--- a/lectures/week-07/evii.pptx
+++ b/lectures/week-07/evii.pptx
@@ -5,7 +5,7 @@
     <p:sldMasterId id="2147483648" r:id="rId1"/>
   </p:sldMasterIdLst>
   <p:notesMasterIdLst>
-    <p:notesMasterId r:id="rId29"/>
+    <p:notesMasterId r:id="rId28"/>
   </p:notesMasterIdLst>
   <p:sldIdLst>
     <p:sldId id="256" r:id="rId2"/>
@@ -34,7 +34,6 @@
     <p:sldId id="279" r:id="rId25"/>
     <p:sldId id="280" r:id="rId26"/>
     <p:sldId id="281" r:id="rId27"/>
-    <p:sldId id="282" r:id="rId28"/>
   </p:sldIdLst>
   <p:sldSz cx="9144000" cy="5143500" type="screen16x9"/>
   <p:notesSz cx="6858000" cy="9144000"/>
@@ -572,7 +571,7 @@
           <a:p>
             <a:fld id="{18BDFEC3-8487-43E8-A154-7C12CBC1FFF2}" type="slidenum">
               <a:rPr lang="en-US"/>
-              <a:t>4</a:t>
+              <a:t>3</a:t>
             </a:fld>
             <a:endParaRPr lang="en-US"/>
           </a:p>
@@ -676,7 +675,7 @@
           <a:p>
             <a:fld id="{18BDFEC3-8487-43E8-A154-7C12CBC1FFF2}" type="slidenum">
               <a:rPr lang="en-US"/>
-              <a:t>16</a:t>
+              <a:t>15</a:t>
             </a:fld>
             <a:endParaRPr lang="en-US"/>
           </a:p>
@@ -772,7 +771,7 @@
           <a:p>
             <a:fld id="{18BDFEC3-8487-43E8-A154-7C12CBC1FFF2}" type="slidenum">
               <a:rPr lang="en-US"/>
-              <a:t>17</a:t>
+              <a:t>16</a:t>
             </a:fld>
             <a:endParaRPr lang="en-US"/>
           </a:p>
@@ -882,7 +881,7 @@
           <a:p>
             <a:fld id="{18BDFEC3-8487-43E8-A154-7C12CBC1FFF2}" type="slidenum">
               <a:rPr lang="en-US"/>
-              <a:t>19</a:t>
+              <a:t>18</a:t>
             </a:fld>
             <a:endParaRPr lang="en-US"/>
           </a:p>
@@ -978,7 +977,7 @@
           <a:p>
             <a:fld id="{18BDFEC3-8487-43E8-A154-7C12CBC1FFF2}" type="slidenum">
               <a:rPr lang="en-US"/>
-              <a:t>20</a:t>
+              <a:t>19</a:t>
             </a:fld>
             <a:endParaRPr lang="en-US"/>
           </a:p>
@@ -1082,7 +1081,7 @@
           <a:p>
             <a:fld id="{18BDFEC3-8487-43E8-A154-7C12CBC1FFF2}" type="slidenum">
               <a:rPr lang="en-US"/>
-              <a:t>21</a:t>
+              <a:t>20</a:t>
             </a:fld>
             <a:endParaRPr lang="en-US"/>
           </a:p>
@@ -1200,7 +1199,7 @@
           <a:p>
             <a:fld id="{18BDFEC3-8487-43E8-A154-7C12CBC1FFF2}" type="slidenum">
               <a:rPr lang="en-US"/>
-              <a:t>23</a:t>
+              <a:t>22</a:t>
             </a:fld>
             <a:endParaRPr lang="en-US"/>
           </a:p>
@@ -1296,7 +1295,7 @@
           <a:p>
             <a:fld id="{18BDFEC3-8487-43E8-A154-7C12CBC1FFF2}" type="slidenum">
               <a:rPr lang="en-US"/>
-              <a:t>24</a:t>
+              <a:t>23</a:t>
             </a:fld>
             <a:endParaRPr lang="en-US"/>
           </a:p>
@@ -1394,7 +1393,7 @@
           <a:p>
             <a:fld id="{18BDFEC3-8487-43E8-A154-7C12CBC1FFF2}" type="slidenum">
               <a:rPr lang="en-US"/>
-              <a:t>25</a:t>
+              <a:t>24</a:t>
             </a:fld>
             <a:endParaRPr lang="en-US"/>
           </a:p>
@@ -1476,7 +1475,7 @@
           <a:p>
             <a:fld id="{18BDFEC3-8487-43E8-A154-7C12CBC1FFF2}" type="slidenum">
               <a:rPr lang="en-US"/>
-              <a:t>26</a:t>
+              <a:t>25</a:t>
             </a:fld>
             <a:endParaRPr lang="en-US"/>
           </a:p>
@@ -1558,7 +1557,7 @@
           <a:p>
             <a:fld id="{18BDFEC3-8487-43E8-A154-7C12CBC1FFF2}" type="slidenum">
               <a:rPr lang="en-US"/>
-              <a:t>5</a:t>
+              <a:t>4</a:t>
             </a:fld>
             <a:endParaRPr lang="en-US"/>
           </a:p>
@@ -1656,7 +1655,7 @@
           <a:p>
             <a:fld id="{18BDFEC3-8487-43E8-A154-7C12CBC1FFF2}" type="slidenum">
               <a:rPr lang="en-US"/>
-              <a:t>7</a:t>
+              <a:t>6</a:t>
             </a:fld>
             <a:endParaRPr lang="en-US"/>
           </a:p>
@@ -1738,7 +1737,7 @@
           <a:p>
             <a:fld id="{18BDFEC3-8487-43E8-A154-7C12CBC1FFF2}" type="slidenum">
               <a:rPr lang="en-US"/>
-              <a:t>8</a:t>
+              <a:t>7</a:t>
             </a:fld>
             <a:endParaRPr lang="en-US"/>
           </a:p>
@@ -1820,7 +1819,7 @@
           <a:p>
             <a:fld id="{18BDFEC3-8487-43E8-A154-7C12CBC1FFF2}" type="slidenum">
               <a:rPr lang="en-US"/>
-              <a:t>10</a:t>
+              <a:t>9</a:t>
             </a:fld>
             <a:endParaRPr lang="en-US"/>
           </a:p>
@@ -1902,7 +1901,7 @@
           <a:p>
             <a:fld id="{18BDFEC3-8487-43E8-A154-7C12CBC1FFF2}" type="slidenum">
               <a:rPr lang="en-US"/>
-              <a:t>11</a:t>
+              <a:t>10</a:t>
             </a:fld>
             <a:endParaRPr lang="en-US"/>
           </a:p>
@@ -1998,7 +1997,7 @@
           <a:p>
             <a:fld id="{18BDFEC3-8487-43E8-A154-7C12CBC1FFF2}" type="slidenum">
               <a:rPr lang="en-US"/>
-              <a:t>12</a:t>
+              <a:t>11</a:t>
             </a:fld>
             <a:endParaRPr lang="en-US"/>
           </a:p>
@@ -2094,7 +2093,7 @@
           <a:p>
             <a:fld id="{18BDFEC3-8487-43E8-A154-7C12CBC1FFF2}" type="slidenum">
               <a:rPr lang="en-US"/>
-              <a:t>13</a:t>
+              <a:t>12</a:t>
             </a:fld>
             <a:endParaRPr lang="en-US"/>
           </a:p>
@@ -2176,7 +2175,7 @@
           <a:p>
             <a:fld id="{18BDFEC3-8487-43E8-A154-7C12CBC1FFF2}" type="slidenum">
               <a:rPr lang="en-US"/>
-              <a:t>14</a:t>
+              <a:t>13</a:t>
             </a:fld>
             <a:endParaRPr lang="en-US"/>
           </a:p>
@@ -5269,53 +5268,6 @@
       </p:grpSpPr>
       <p:sp>
         <p:nvSpPr>
-          <p:cNvPr id="3" name="Content Placeholder 2"/>
-          <p:cNvSpPr>
-            <a:spLocks noGrp="1"/>
-          </p:cNvSpPr>
-          <p:nvPr>
-            <p:ph idx="1"/>
-          </p:nvPr>
-        </p:nvSpPr>
-        <p:spPr/>
-        <p:txBody>
-          <a:bodyPr/>
-          <a:lstStyle/>
-          <a:p>
-            <a:pPr lvl="0" indent="0" marL="0">
-              <a:buNone/>
-            </a:pPr>
-            <a:r>
-              <a:rPr/>
-              <a:t>Decision tree with perfect information. Nature reveals the state, then you choose.</a:t>
-            </a:r>
-          </a:p>
-        </p:txBody>
-      </p:sp>
-    </p:spTree>
-  </p:cSld>
-</p:sld>
-</file>
-
-<file path=ppt/slides/slide11.xml><?xml version="1.0" encoding="utf-8"?>
-<p:sld xmlns:a="http://schemas.openxmlformats.org/drawingml/2006/main" xmlns:r="http://schemas.openxmlformats.org/officeDocument/2006/relationships" xmlns:p="http://schemas.openxmlformats.org/presentationml/2006/main">
-  <p:cSld>
-    <p:spTree>
-      <p:nvGrpSpPr>
-        <p:cNvPr id="1" name=""/>
-        <p:cNvGrpSpPr/>
-        <p:nvPr/>
-      </p:nvGrpSpPr>
-      <p:grpSpPr>
-        <a:xfrm>
-          <a:off x="0" y="0"/>
-          <a:ext cx="0" cy="0"/>
-          <a:chOff x="0" y="0"/>
-          <a:chExt cx="0" cy="0"/>
-        </a:xfrm>
-      </p:grpSpPr>
-      <p:sp>
-        <p:nvSpPr>
           <p:cNvPr id="2" name="Title 1"/>
           <p:cNvSpPr>
             <a:spLocks noGrp="1"/>
@@ -5523,7 +5475,7 @@
 </p:sld>
 </file>
 
-<file path=ppt/slides/slide12.xml><?xml version="1.0" encoding="utf-8"?>
+<file path=ppt/slides/slide11.xml><?xml version="1.0" encoding="utf-8"?>
 <p:sld xmlns:a="http://schemas.openxmlformats.org/drawingml/2006/main" xmlns:r="http://schemas.openxmlformats.org/officeDocument/2006/relationships" xmlns:p="http://schemas.openxmlformats.org/presentationml/2006/main">
   <p:cSld>
     <p:spTree>
@@ -5793,7 +5745,7 @@
 </p:sld>
 </file>
 
-<file path=ppt/slides/slide13.xml><?xml version="1.0" encoding="utf-8"?>
+<file path=ppt/slides/slide12.xml><?xml version="1.0" encoding="utf-8"?>
 <p:sld xmlns:a="http://schemas.openxmlformats.org/drawingml/2006/main" xmlns:r="http://schemas.openxmlformats.org/officeDocument/2006/relationships" xmlns:p="http://schemas.openxmlformats.org/presentationml/2006/main">
   <p:cSld>
     <p:spTree>
@@ -6070,7 +6022,7 @@
 </p:sld>
 </file>
 
-<file path=ppt/slides/slide14.xml><?xml version="1.0" encoding="utf-8"?>
+<file path=ppt/slides/slide13.xml><?xml version="1.0" encoding="utf-8"?>
 <p:sld xmlns:a="http://schemas.openxmlformats.org/drawingml/2006/main" xmlns:r="http://schemas.openxmlformats.org/officeDocument/2006/relationships" xmlns:p="http://schemas.openxmlformats.org/presentationml/2006/main">
   <p:cSld>
     <p:spTree>
@@ -6497,7 +6449,7 @@
 </p:sld>
 </file>
 
-<file path=ppt/slides/slide15.xml><?xml version="1.0" encoding="utf-8"?>
+<file path=ppt/slides/slide14.xml><?xml version="1.0" encoding="utf-8"?>
 <p:sld xmlns:a="http://schemas.openxmlformats.org/drawingml/2006/main" xmlns:r="http://schemas.openxmlformats.org/officeDocument/2006/relationships" xmlns:p="http://schemas.openxmlformats.org/presentationml/2006/main">
   <p:cSld>
     <p:spTree>
@@ -10745,7 +10697,7 @@
 </p:sld>
 </file>
 
-<file path=ppt/slides/slide16.xml><?xml version="1.0" encoding="utf-8"?>
+<file path=ppt/slides/slide15.xml><?xml version="1.0" encoding="utf-8"?>
 <p:sld xmlns:a="http://schemas.openxmlformats.org/drawingml/2006/main" xmlns:r="http://schemas.openxmlformats.org/officeDocument/2006/relationships" xmlns:p="http://schemas.openxmlformats.org/presentationml/2006/main">
   <p:cSld>
     <p:spTree>
@@ -10792,7 +10744,7 @@
 </p:sld>
 </file>
 
-<file path=ppt/slides/slide17.xml><?xml version="1.0" encoding="utf-8"?>
+<file path=ppt/slides/slide16.xml><?xml version="1.0" encoding="utf-8"?>
 <p:sld xmlns:a="http://schemas.openxmlformats.org/drawingml/2006/main" xmlns:r="http://schemas.openxmlformats.org/officeDocument/2006/relationships" xmlns:p="http://schemas.openxmlformats.org/presentationml/2006/main">
   <p:cSld>
     <p:spTree>
@@ -11261,7 +11213,7 @@
 </p:sld>
 </file>
 
-<file path=ppt/slides/slide18.xml><?xml version="1.0" encoding="utf-8"?>
+<file path=ppt/slides/slide17.xml><?xml version="1.0" encoding="utf-8"?>
 <p:sld xmlns:a="http://schemas.openxmlformats.org/drawingml/2006/main" xmlns:r="http://schemas.openxmlformats.org/officeDocument/2006/relationships" xmlns:p="http://schemas.openxmlformats.org/presentationml/2006/main">
   <p:cSld>
     <p:spTree>
@@ -15784,7 +15736,7 @@
 </p:sld>
 </file>
 
-<file path=ppt/slides/slide19.xml><?xml version="1.0" encoding="utf-8"?>
+<file path=ppt/slides/slide18.xml><?xml version="1.0" encoding="utf-8"?>
 <p:sld xmlns:a="http://schemas.openxmlformats.org/drawingml/2006/main" xmlns:r="http://schemas.openxmlformats.org/officeDocument/2006/relationships" xmlns:p="http://schemas.openxmlformats.org/presentationml/2006/main">
   <p:cSld>
     <p:spTree>
@@ -15831,58 +15783,7 @@
 </p:sld>
 </file>
 
-<file path=ppt/slides/slide2.xml><?xml version="1.0" encoding="utf-8"?>
-<p:sld xmlns:a="http://schemas.openxmlformats.org/drawingml/2006/main" xmlns:r="http://schemas.openxmlformats.org/officeDocument/2006/relationships" xmlns:p="http://schemas.openxmlformats.org/presentationml/2006/main">
-  <p:cSld>
-    <p:spTree>
-      <p:nvGrpSpPr>
-        <p:cNvPr id="1" name=""/>
-        <p:cNvGrpSpPr/>
-        <p:nvPr/>
-      </p:nvGrpSpPr>
-      <p:grpSpPr>
-        <a:xfrm>
-          <a:off x="0" y="0"/>
-          <a:ext cx="0" cy="0"/>
-          <a:chOff x="0" y="0"/>
-          <a:chExt cx="0" cy="0"/>
-        </a:xfrm>
-      </p:grpSpPr>
-      <p:sp>
-        <p:nvSpPr>
-          <p:cNvPr id="3" name="Content Placeholder 2"/>
-          <p:cNvSpPr>
-            <a:spLocks noGrp="1"/>
-          </p:cNvSpPr>
-          <p:nvPr>
-            <p:ph idx="1"/>
-          </p:nvPr>
-        </p:nvSpPr>
-        <p:spPr/>
-        <p:txBody>
-          <a:bodyPr/>
-          <a:lstStyle/>
-          <a:p>
-            <a:pPr lvl="0" indent="0" marL="0">
-              <a:buNone/>
-            </a:pPr>
-            <a:r>
-              <a:rPr b="1"/>
-              <a:t>Draft Material:</a:t>
-            </a:r>
-            <a:r>
-              <a:rPr/>
-              <a:t> This content is under development and subject to change.</a:t>
-            </a:r>
-          </a:p>
-        </p:txBody>
-      </p:sp>
-    </p:spTree>
-  </p:cSld>
-</p:sld>
-</file>
-
-<file path=ppt/slides/slide20.xml><?xml version="1.0" encoding="utf-8"?>
+<file path=ppt/slides/slide19.xml><?xml version="1.0" encoding="utf-8"?>
 <p:sld xmlns:a="http://schemas.openxmlformats.org/drawingml/2006/main" xmlns:r="http://schemas.openxmlformats.org/officeDocument/2006/relationships" xmlns:p="http://schemas.openxmlformats.org/presentationml/2006/main">
   <p:cSld>
     <p:spTree>
@@ -16221,7 +16122,10 @@
 </p:sld>
 </file>
 
-<file path=ppt/slides/slide21.xml><?xml version="1.0" encoding="utf-8"?>
+<file path=ppt/slides/slide2.xml><?xml version="1.0" encoding="UTF-8"?><p:sld xmlns:a="http://schemas.openxmlformats.org/drawingml/2006/main" xmlns:r="http://schemas.openxmlformats.org/officeDocument/2006/relationships" xmlns:p="http://schemas.openxmlformats.org/presentationml/2006/main"><p:cSld><p:spTree><p:nvGrpSpPr><p:cNvPr id="1" name="" /><p:cNvGrpSpPr /><p:nvPr /></p:nvGrpSpPr><p:grpSpPr><a:xfrm><a:off x="0" y="0" /><a:ext cx="0" cy="0" /><a:chOff x="0" y="0" /><a:chExt cx="0" cy="0" /></a:xfrm></p:grpSpPr><p:sp><p:nvSpPr><p:cNvPr id="2" name="Title 1" /><p:cNvSpPr><a:spLocks noGrp="1" /></p:cNvSpPr><p:nvPr><p:ph type="title" /></p:nvPr></p:nvSpPr><p:spPr /><p:txBody><a:bodyPr /><a:lstStyle /><a:p><a:pPr lvl="0" indent="0" marL="0"><a:buNone /></a:pPr><a:r><a:rPr /><a:t>Recap: Monday’s Umbrella Problem</a:t></a:r></a:p></p:txBody></p:sp><p:graphicFrame><p:nvGraphicFramePr><p:cNvPr id="6" name="Content Placeholder 5" /><p:cNvGraphicFramePr><a:graphicFrameLocks noGrp="1" /></p:cNvGraphicFramePr><p:nvPr><p:ph idx="1" /></p:nvPr></p:nvGraphicFramePr><p:xfrm><a:off x="457200" y="1193800" /><a:ext cx="8229600" cy="3390900" /></p:xfrm><a:graphic><a:graphicData uri="http://schemas.openxmlformats.org/drawingml/2006/table"><a:tbl><a:tblPr firstRow="1" bandRow="1"><a:tableStyleId>{5C22544A-7EE6-4342-B048-85BDC9FD1C3A}</a:tableStyleId></a:tblPr><a:tblGrid><a:gridCol w="2743200" /><a:gridCol w="2743200" /><a:gridCol w="2743200" /></a:tblGrid><a:tr h="0"><a:tc><a:txBody><a:bodyPr /><a:lstStyle /><a:p><a:endParaRPr /></a:p></a:txBody><a:tcPr /></a:tc><a:tc><a:txBody><a:bodyPr /><a:lstStyle /><a:p><a:pPr lvl="0" indent="0" marL="0" algn="ctr"><a:buNone /></a:pPr><a:r><a:rPr /><a:t>Bring umbrella</a:t></a:r></a:p></a:txBody><a:tcPr /></a:tc><a:tc><a:txBody><a:bodyPr /><a:lstStyle /><a:p><a:pPr lvl="0" indent="0" marL="0" algn="ctr"><a:buNone /></a:pPr><a:r><a:rPr /><a:t>Don’t bring</a:t></a:r></a:p></a:txBody><a:tcPr /></a:tc></a:tr><a:tr h="0"><a:tc><a:txBody><a:bodyPr /><a:lstStyle /><a:p><a:pPr lvl="0" indent="0" marL="0" algn="l"><a:buNone /></a:pPr><a:r><a:rPr /><a:t>Rain (</a:t></a:r><a14:m><m:oMath xmlns:m="http://schemas.openxmlformats.org/officeDocument/2006/math"><m:r><m:t>p</m:t></m:r><m:r><m:rPr><m:sty m:val="p" /></m:rPr><m:t>=</m:t></m:r><m:r><m:t>0.3</m:t></m:r></m:oMath></a14:m><a:r><a:rPr /><a:t>)</a:t></a:r></a:p></a:txBody></a:tc><a:tc><a:txBody><a:bodyPr /><a:lstStyle /><a:p><a:pPr lvl="0" indent="0" marL="0" algn="ctr"><a:buNone /></a:pPr><a14:m><m:oMath xmlns:m="http://schemas.openxmlformats.org/officeDocument/2006/math"><m:r><m:rPr><m:sty m:val="p" /></m:rPr><m:t>−</m:t></m:r><m:r><m:t>5</m:t></m:r></m:oMath></a14:m></a:p></a:txBody></a:tc><a:tc><a:txBody><a:bodyPr /><a:lstStyle /><a:p><a:pPr lvl="0" indent="0" marL="0" algn="ctr"><a:buNone /></a:pPr><a14:m><m:oMath xmlns:m="http://schemas.openxmlformats.org/officeDocument/2006/math"><m:r><m:rPr><m:sty m:val="p" /></m:rPr><m:t>−</m:t></m:r><m:r><m:t>50</m:t></m:r></m:oMath></a14:m></a:p></a:txBody></a:tc></a:tr><a:tr h="0"><a:tc><a:txBody><a:bodyPr /><a:lstStyle /><a:p><a:pPr lvl="0" indent="0" marL="0" algn="l"><a:buNone /></a:pPr><a:r><a:rPr /><a:t>No rain (</a:t></a:r><a14:m><m:oMath xmlns:m="http://schemas.openxmlformats.org/officeDocument/2006/math"><m:r><m:t>1</m:t></m:r><m:r><m:rPr><m:sty m:val="p" /></m:rPr><m:t>−</m:t></m:r><m:r><m:t>p</m:t></m:r><m:r><m:rPr><m:sty m:val="p" /></m:rPr><m:t>=</m:t></m:r><m:r><m:t>0.7</m:t></m:r></m:oMath></a14:m><a:r><a:rPr /><a:t>)</a:t></a:r></a:p></a:txBody></a:tc><a:tc><a:txBody><a:bodyPr /><a:lstStyle /><a:p><a:pPr lvl="0" indent="0" marL="0" algn="ctr"><a:buNone /></a:pPr><a14:m><m:oMath xmlns:m="http://schemas.openxmlformats.org/officeDocument/2006/math"><m:r><m:rPr><m:sty m:val="p" /></m:rPr><m:t>−</m:t></m:r><m:r><m:t>5</m:t></m:r></m:oMath></a14:m></a:p></a:txBody></a:tc><a:tc><a:txBody><a:bodyPr /><a:lstStyle /><a:p><a:pPr lvl="0" indent="0" marL="0" algn="ctr"><a:buNone /></a:pPr><a14:m><m:oMath xmlns:m="http://schemas.openxmlformats.org/officeDocument/2006/math"><m:r><m:t>0</m:t></m:r></m:oMath></a14:m></a:p></a:txBody></a:tc></a:tr></a:tbl></a:graphicData></a:graphic></p:graphicFrame></p:spTree></p:cSld></p:sld>
+</file>
+
+<file path=ppt/slides/slide20.xml><?xml version="1.0" encoding="utf-8"?>
 <p:sld xmlns:a="http://schemas.openxmlformats.org/drawingml/2006/main" xmlns:r="http://schemas.openxmlformats.org/officeDocument/2006/relationships" xmlns:p="http://schemas.openxmlformats.org/presentationml/2006/main">
   <p:cSld>
     <p:spTree>
@@ -16533,10 +16437,10 @@
 </p:sld>
 </file>
 
-<file path=ppt/slides/slide22.xml><?xml version="1.0" encoding="UTF-8"?><p:sld xmlns:a="http://schemas.openxmlformats.org/drawingml/2006/main" xmlns:r="http://schemas.openxmlformats.org/officeDocument/2006/relationships" xmlns:p="http://schemas.openxmlformats.org/presentationml/2006/main"><p:cSld><p:spTree><p:nvGrpSpPr><p:cNvPr id="1" name="" /><p:cNvGrpSpPr /><p:nvPr /></p:nvGrpSpPr><p:grpSpPr><a:xfrm><a:off x="0" y="0" /><a:ext cx="0" cy="0" /><a:chOff x="0" y="0" /><a:chExt cx="0" cy="0" /></a:xfrm></p:grpSpPr><p:sp><p:nvSpPr><p:cNvPr id="2" name="Title 1" /><p:cNvSpPr><a:spLocks noGrp="1" /></p:cNvSpPr><p:nvPr><p:ph type="title" /></p:nvPr></p:nvSpPr><p:spPr /><p:txBody><a:bodyPr /><a:lstStyle /><a:p><a:pPr lvl="0" indent="0" marL="0"><a:buNone /></a:pPr><a:r><a:rPr /><a:t>EVII</a:t></a:r></a:p></p:txBody></p:sp><p:graphicFrame><p:nvGraphicFramePr><p:cNvPr id="6" name="Content Placeholder 5" /><p:cNvGraphicFramePr><a:graphicFrameLocks noGrp="1" /></p:cNvGraphicFramePr><p:nvPr><p:ph idx="1" /></p:nvPr></p:nvGraphicFramePr><p:xfrm><a:off x="457200" y="1193800" /><a:ext cx="8229600" cy="3390900" /></p:xfrm><a:graphic><a:graphicData uri="http://schemas.openxmlformats.org/drawingml/2006/table"><a:tbl><a:tblPr firstRow="1" bandRow="1"><a:tableStyleId>{5C22544A-7EE6-4342-B048-85BDC9FD1C3A}</a:tableStyleId></a:tblPr><a:tblGrid><a:gridCol w="4114800" /><a:gridCol w="4114800" /></a:tblGrid><a:tr h="0"><a:tc><a:txBody><a:bodyPr /><a:lstStyle /><a:p><a:pPr lvl="0" indent="0" marL="0" algn="l"><a:buNone /></a:pPr><a:r><a:rPr /><a:t>Scenario</a:t></a:r></a:p></a:txBody><a:tcPr /></a:tc><a:tc><a:txBody><a:bodyPr /><a:lstStyle /><a:p><a:pPr lvl="0" indent="0" marL="0" algn="ctr"><a:buNone /></a:pPr><a:r><a:rPr /><a:t>Expected cost</a:t></a:r></a:p></a:txBody><a:tcPr /></a:tc></a:tr><a:tr h="0"><a:tc><a:txBody><a:bodyPr /><a:lstStyle /><a:p><a:pPr lvl="0" indent="0" marL="0" algn="l"><a:buNone /></a:pPr><a:r><a:rPr /><a:t>No information</a:t></a:r></a:p></a:txBody></a:tc><a:tc><a:txBody><a:bodyPr /><a:lstStyle /><a:p><a:pPr lvl="0" indent="0" marL="0" algn="ctr"><a:buNone /></a:pPr><a14:m><m:oMath xmlns:m="http://schemas.openxmlformats.org/officeDocument/2006/math"><m:r><m:rPr><m:sty m:val="p" /></m:rPr><m:t>$</m:t></m:r><m:r><m:t>5.00</m:t></m:r></m:oMath></a14:m></a:p></a:txBody></a:tc></a:tr><a:tr h="0"><a:tc><a:txBody><a:bodyPr /><a:lstStyle /><a:p><a:pPr lvl="0" indent="0" marL="0" algn="l"><a:buNone /></a:pPr><a:r><a:rPr /><a:t>Imperfect forecast</a:t></a:r></a:p></a:txBody></a:tc><a:tc><a:txBody><a:bodyPr /><a:lstStyle /><a:p><a:pPr lvl="0" indent="0" marL="0" algn="ctr"><a:buNone /></a:pPr><a14:m><m:oMath xmlns:m="http://schemas.openxmlformats.org/officeDocument/2006/math"><m:r><m:rPr><m:sty m:val="p" /></m:rPr><m:t>$</m:t></m:r><m:r><m:t>3.55</m:t></m:r></m:oMath></a14:m></a:p></a:txBody></a:tc></a:tr><a:tr h="0"><a:tc><a:txBody><a:bodyPr /><a:lstStyle /><a:p><a:pPr lvl="0" indent="0" marL="0" algn="l"><a:buNone /></a:pPr><a:r><a:rPr /><a:t>Perfect information</a:t></a:r></a:p></a:txBody></a:tc><a:tc><a:txBody><a:bodyPr /><a:lstStyle /><a:p><a:pPr lvl="0" indent="0" marL="0" algn="ctr"><a:buNone /></a:pPr><a14:m><m:oMath xmlns:m="http://schemas.openxmlformats.org/officeDocument/2006/math"><m:r><m:rPr><m:sty m:val="p" /></m:rPr><m:t>$</m:t></m:r><m:r><m:t>1.50</m:t></m:r></m:oMath></a14:m></a:p></a:txBody></a:tc></a:tr></a:tbl></a:graphicData></a:graphic></p:graphicFrame></p:spTree></p:cSld></p:sld>
+<file path=ppt/slides/slide21.xml><?xml version="1.0" encoding="UTF-8"?><p:sld xmlns:a="http://schemas.openxmlformats.org/drawingml/2006/main" xmlns:r="http://schemas.openxmlformats.org/officeDocument/2006/relationships" xmlns:p="http://schemas.openxmlformats.org/presentationml/2006/main"><p:cSld><p:spTree><p:nvGrpSpPr><p:cNvPr id="1" name="" /><p:cNvGrpSpPr /><p:nvPr /></p:nvGrpSpPr><p:grpSpPr><a:xfrm><a:off x="0" y="0" /><a:ext cx="0" cy="0" /><a:chOff x="0" y="0" /><a:chExt cx="0" cy="0" /></a:xfrm></p:grpSpPr><p:sp><p:nvSpPr><p:cNvPr id="2" name="Title 1" /><p:cNvSpPr><a:spLocks noGrp="1" /></p:cNvSpPr><p:nvPr><p:ph type="title" /></p:nvPr></p:nvSpPr><p:spPr /><p:txBody><a:bodyPr /><a:lstStyle /><a:p><a:pPr lvl="0" indent="0" marL="0"><a:buNone /></a:pPr><a:r><a:rPr /><a:t>EVII</a:t></a:r></a:p></p:txBody></p:sp><p:graphicFrame><p:nvGraphicFramePr><p:cNvPr id="6" name="Content Placeholder 5" /><p:cNvGraphicFramePr><a:graphicFrameLocks noGrp="1" /></p:cNvGraphicFramePr><p:nvPr><p:ph idx="1" /></p:nvPr></p:nvGraphicFramePr><p:xfrm><a:off x="457200" y="1193800" /><a:ext cx="8229600" cy="3390900" /></p:xfrm><a:graphic><a:graphicData uri="http://schemas.openxmlformats.org/drawingml/2006/table"><a:tbl><a:tblPr firstRow="1" bandRow="1"><a:tableStyleId>{5C22544A-7EE6-4342-B048-85BDC9FD1C3A}</a:tableStyleId></a:tblPr><a:tblGrid><a:gridCol w="4114800" /><a:gridCol w="4114800" /></a:tblGrid><a:tr h="0"><a:tc><a:txBody><a:bodyPr /><a:lstStyle /><a:p><a:pPr lvl="0" indent="0" marL="0" algn="l"><a:buNone /></a:pPr><a:r><a:rPr /><a:t>Scenario</a:t></a:r></a:p></a:txBody><a:tcPr /></a:tc><a:tc><a:txBody><a:bodyPr /><a:lstStyle /><a:p><a:pPr lvl="0" indent="0" marL="0" algn="ctr"><a:buNone /></a:pPr><a:r><a:rPr /><a:t>Expected cost</a:t></a:r></a:p></a:txBody><a:tcPr /></a:tc></a:tr><a:tr h="0"><a:tc><a:txBody><a:bodyPr /><a:lstStyle /><a:p><a:pPr lvl="0" indent="0" marL="0" algn="l"><a:buNone /></a:pPr><a:r><a:rPr /><a:t>No information</a:t></a:r></a:p></a:txBody></a:tc><a:tc><a:txBody><a:bodyPr /><a:lstStyle /><a:p><a:pPr lvl="0" indent="0" marL="0" algn="ctr"><a:buNone /></a:pPr><a14:m><m:oMath xmlns:m="http://schemas.openxmlformats.org/officeDocument/2006/math"><m:r><m:rPr><m:sty m:val="p" /></m:rPr><m:t>$</m:t></m:r><m:r><m:t>5.00</m:t></m:r></m:oMath></a14:m></a:p></a:txBody></a:tc></a:tr><a:tr h="0"><a:tc><a:txBody><a:bodyPr /><a:lstStyle /><a:p><a:pPr lvl="0" indent="0" marL="0" algn="l"><a:buNone /></a:pPr><a:r><a:rPr /><a:t>Imperfect forecast</a:t></a:r></a:p></a:txBody></a:tc><a:tc><a:txBody><a:bodyPr /><a:lstStyle /><a:p><a:pPr lvl="0" indent="0" marL="0" algn="ctr"><a:buNone /></a:pPr><a14:m><m:oMath xmlns:m="http://schemas.openxmlformats.org/officeDocument/2006/math"><m:r><m:rPr><m:sty m:val="p" /></m:rPr><m:t>$</m:t></m:r><m:r><m:t>3.55</m:t></m:r></m:oMath></a14:m></a:p></a:txBody></a:tc></a:tr><a:tr h="0"><a:tc><a:txBody><a:bodyPr /><a:lstStyle /><a:p><a:pPr lvl="0" indent="0" marL="0" algn="l"><a:buNone /></a:pPr><a:r><a:rPr /><a:t>Perfect information</a:t></a:r></a:p></a:txBody></a:tc><a:tc><a:txBody><a:bodyPr /><a:lstStyle /><a:p><a:pPr lvl="0" indent="0" marL="0" algn="ctr"><a:buNone /></a:pPr><a14:m><m:oMath xmlns:m="http://schemas.openxmlformats.org/officeDocument/2006/math"><m:r><m:rPr><m:sty m:val="p" /></m:rPr><m:t>$</m:t></m:r><m:r><m:t>1.50</m:t></m:r></m:oMath></a14:m></a:p></a:txBody></a:tc></a:tr></a:tbl></a:graphicData></a:graphic></p:graphicFrame></p:spTree></p:cSld></p:sld>
 </file>
 
-<file path=ppt/slides/slide23.xml><?xml version="1.0" encoding="utf-8"?>
+<file path=ppt/slides/slide22.xml><?xml version="1.0" encoding="utf-8"?>
 <p:sld xmlns:a="http://schemas.openxmlformats.org/drawingml/2006/main" xmlns:r="http://schemas.openxmlformats.org/officeDocument/2006/relationships" xmlns:p="http://schemas.openxmlformats.org/presentationml/2006/main">
   <p:cSld>
     <p:spTree>
@@ -16730,7 +16634,7 @@
 </p:sld>
 </file>
 
-<file path=ppt/slides/slide24.xml><?xml version="1.0" encoding="utf-8"?>
+<file path=ppt/slides/slide23.xml><?xml version="1.0" encoding="utf-8"?>
 <p:sld xmlns:a="http://schemas.openxmlformats.org/drawingml/2006/main" xmlns:r="http://schemas.openxmlformats.org/officeDocument/2006/relationships" xmlns:p="http://schemas.openxmlformats.org/presentationml/2006/main">
   <p:cSld>
     <p:spTree>
@@ -17267,6 +17171,182 @@
 </p:sld>
 </file>
 
+<file path=ppt/slides/slide24.xml><?xml version="1.0" encoding="utf-8"?>
+<p:sld xmlns:a="http://schemas.openxmlformats.org/drawingml/2006/main" xmlns:r="http://schemas.openxmlformats.org/officeDocument/2006/relationships" xmlns:p="http://schemas.openxmlformats.org/presentationml/2006/main">
+  <p:cSld>
+    <p:spTree>
+      <p:nvGrpSpPr>
+        <p:cNvPr id="1" name=""/>
+        <p:cNvGrpSpPr/>
+        <p:nvPr/>
+      </p:nvGrpSpPr>
+      <p:grpSpPr>
+        <a:xfrm>
+          <a:off x="0" y="0"/>
+          <a:ext cx="0" cy="0"/>
+          <a:chOff x="0" y="0"/>
+          <a:chExt cx="0" cy="0"/>
+        </a:xfrm>
+      </p:grpSpPr>
+      <p:sp>
+        <p:nvSpPr>
+          <p:cNvPr id="2" name="Title 1"/>
+          <p:cNvSpPr>
+            <a:spLocks noGrp="1"/>
+          </p:cNvSpPr>
+          <p:nvPr>
+            <p:ph type="title"/>
+          </p:nvPr>
+        </p:nvSpPr>
+        <p:spPr/>
+        <p:txBody>
+          <a:bodyPr/>
+          <a:lstStyle/>
+          <a:p>
+            <a:pPr lvl="0" indent="0" marL="0">
+              <a:buNone/>
+            </a:pPr>
+            <a:r>
+              <a:rPr/>
+              <a:t>Blackwell’s Theorem</a:t>
+            </a:r>
+          </a:p>
+        </p:txBody>
+      </p:sp>
+      <mc:AlternateContent xmlns:mc="http://schemas.openxmlformats.org/markup-compatibility/2006">
+        <mc:Choice xmlns:a14="http://schemas.microsoft.com/office/drawing/2010/main" Requires="a14">
+          <p:sp>
+            <p:nvSpPr>
+              <p:cNvPr id="3" name="Content Placeholder 2"/>
+              <p:cNvSpPr>
+                <a:spLocks noGrp="1"/>
+              </p:cNvSpPr>
+              <p:nvPr>
+                <p:ph idx="1"/>
+              </p:nvPr>
+            </p:nvSpPr>
+            <p:spPr/>
+            <p:txBody>
+              <a:bodyPr/>
+              <a:lstStyle/>
+              <a:p>
+                <a:pPr lvl="0" indent="0" marL="0">
+                  <a:buNone/>
+                </a:pPr>
+                <a:r>
+                  <a:rPr/>
+                  <a:t>A key result (Blackwell 1953): </a:t>
+                </a:r>
+                <a14:m>
+                  <m:oMath xmlns:m="http://schemas.openxmlformats.org/officeDocument/2006/math">
+                    <m:r>
+                      <m:t>0</m:t>
+                    </m:r>
+                    <m:r>
+                      <m:rPr>
+                        <m:sty m:val="p"/>
+                      </m:rPr>
+                      <m:t>≤</m:t>
+                    </m:r>
+                    <m:r>
+                      <m:rPr>
+                        <m:nor/>
+                        <m:sty m:val="p"/>
+                      </m:rPr>
+                      <m:t>EVII</m:t>
+                    </m:r>
+                    <m:r>
+                      <m:rPr>
+                        <m:sty m:val="p"/>
+                      </m:rPr>
+                      <m:t>≤</m:t>
+                    </m:r>
+                    <m:r>
+                      <m:rPr>
+                        <m:nor/>
+                        <m:sty m:val="p"/>
+                      </m:rPr>
+                      <m:t>EVPI</m:t>
+                    </m:r>
+                  </m:oMath>
+                </a14:m>
+                <a:r>
+                  <a:rPr/>
+                  <a:t>.</a:t>
+                </a:r>
+              </a:p>
+              <a:p>
+                <a:pPr lvl="0" indent="0" marL="0">
+                  <a:buNone/>
+                </a:pPr>
+                <a:r>
+                  <a:rPr/>
+                  <a:t>An imperfect forecast can never hurt in expectation.</a:t>
+                </a:r>
+              </a:p>
+              <a:p>
+                <a:pPr lvl="0" indent="0" marL="0">
+                  <a:buNone/>
+                </a:pPr>
+                <a:r>
+                  <a:rPr/>
+                  <a:t>The relationship between forecast quality and value is </a:t>
+                </a:r>
+                <a:r>
+                  <a:rPr b="1"/>
+                  <a:t>nonlinear</a:t>
+                </a:r>
+                <a:r>
+                  <a:rPr/>
+                  <a:t>. Forecasts are most valuable near the </a:t>
+                </a:r>
+                <a:r>
+                  <a:rPr b="1"/>
+                  <a:t>decision boundary</a:t>
+                </a:r>
+                <a:r>
+                  <a:rPr/>
+                  <a:t> (</a:t>
+                </a:r>
+                <a14:m>
+                  <m:oMath xmlns:m="http://schemas.openxmlformats.org/officeDocument/2006/math">
+                    <m:r>
+                      <m:t>C</m:t>
+                    </m:r>
+                    <m:r>
+                      <m:rPr>
+                        <m:sty m:val="p"/>
+                      </m:rPr>
+                      <m:t>/</m:t>
+                    </m:r>
+                    <m:r>
+                      <m:t>L</m:t>
+                    </m:r>
+                    <m:r>
+                      <m:rPr>
+                        <m:sty m:val="p"/>
+                      </m:rPr>
+                      <m:t>≈</m:t>
+                    </m:r>
+                    <m:r>
+                      <m:t>p</m:t>
+                    </m:r>
+                  </m:oMath>
+                </a14:m>
+                <a:r>
+                  <a:rPr/>
+                  <a:t>). When the decision is already obvious, even a much better forecast adds little value.</a:t>
+                </a:r>
+              </a:p>
+            </p:txBody>
+          </p:sp>
+        </mc:Choice>
+      </mc:AlternateContent>
+    </p:spTree>
+  </p:cSld>
+</p:sld>
+</file>
+
 <file path=ppt/slides/slide25.xml><?xml version="1.0" encoding="utf-8"?>
 <p:sld xmlns:a="http://schemas.openxmlformats.org/drawingml/2006/main" xmlns:r="http://schemas.openxmlformats.org/officeDocument/2006/relationships" xmlns:p="http://schemas.openxmlformats.org/presentationml/2006/main">
   <p:cSld>
@@ -17304,7 +17384,7 @@
             </a:pPr>
             <a:r>
               <a:rPr/>
-              <a:t>Blackwell’s Theorem</a:t>
+              <a:t>Summary</a:t>
             </a:r>
           </a:p>
         </p:txBody>
@@ -17326,12 +17406,85 @@
               <a:bodyPr/>
               <a:lstStyle/>
               <a:p>
-                <a:pPr lvl="0" indent="0" marL="0">
-                  <a:buNone/>
+                <a:pPr lvl="0" indent="-342900" marL="342900">
+                  <a:buAutoNum type="arabicPeriod"/>
                 </a:pPr>
                 <a:r>
+                  <a:rPr b="1"/>
+                  <a:t>Decision trees</a:t>
+                </a:r>
+                <a:r>
                   <a:rPr/>
-                  <a:t>A key result (Blackwell 1953): </a:t>
+                  <a:t> visualize the order of </a:t>
+                </a:r>
+                <a14:m>
+                  <m:oMath xmlns:m="http://schemas.openxmlformats.org/officeDocument/2006/math">
+                    <m:r>
+                      <m:rPr>
+                        <m:sty m:val="p"/>
+                      </m:rPr>
+                      <m:t>max</m:t>
+                    </m:r>
+                  </m:oMath>
+                </a14:m>
+                <a:r>
+                  <a:rPr/>
+                  <a:t> and </a:t>
+                </a:r>
+                <a14:m>
+                  <m:oMath xmlns:m="http://schemas.openxmlformats.org/officeDocument/2006/math">
+                    <m:r>
+                      <m:rPr>
+                        <m:sty m:val="p"/>
+                      </m:rPr>
+                      <m:t>∑</m:t>
+                    </m:r>
+                  </m:oMath>
+                </a14:m>
+                <a:r>
+                  <a:rPr/>
+                  <a:t> in expected value calculations. The EVPI is the gap between “nature first” and “decision first” trees.</a:t>
+                </a:r>
+              </a:p>
+              <a:p>
+                <a:pPr lvl="0" indent="-342900" marL="342900">
+                  <a:buAutoNum type="arabicPeriod"/>
+                </a:pPr>
+                <a:r>
+                  <a:rPr b="1"/>
+                  <a:t>EVII</a:t>
+                </a:r>
+                <a:r>
+                  <a:rPr/>
+                  <a:t> extends this to noisy signals: Signal </a:t>
+                </a:r>
+                <a14:m>
+                  <m:oMath xmlns:m="http://schemas.openxmlformats.org/officeDocument/2006/math">
+                    <m:r>
+                      <m:rPr>
+                        <m:sty m:val="p"/>
+                      </m:rPr>
+                      <m:t>→</m:t>
+                    </m:r>
+                  </m:oMath>
+                </a14:m>
+                <a:r>
+                  <a:rPr/>
+                  <a:t> Decision </a:t>
+                </a:r>
+                <a14:m>
+                  <m:oMath xmlns:m="http://schemas.openxmlformats.org/officeDocument/2006/math">
+                    <m:r>
+                      <m:rPr>
+                        <m:sty m:val="p"/>
+                      </m:rPr>
+                      <m:t>→</m:t>
+                    </m:r>
+                  </m:oMath>
+                </a14:m>
+                <a:r>
+                  <a:rPr/>
+                  <a:t> Nature. Bayes’ rule computes posteriors; Blackwell’s theorem guarantees </a:t>
                 </a:r>
                 <a14:m>
                   <m:oMath xmlns:m="http://schemas.openxmlformats.org/officeDocument/2006/math">
@@ -17372,66 +17525,12 @@
                 </a:r>
               </a:p>
               <a:p>
-                <a:pPr lvl="0" indent="0" marL="0">
-                  <a:buNone/>
+                <a:pPr lvl="0" indent="-342900" marL="342900">
+                  <a:buAutoNum type="arabicPeriod"/>
                 </a:pPr>
                 <a:r>
                   <a:rPr/>
-                  <a:t>An imperfect forecast can never hurt in expectation.</a:t>
-                </a:r>
-              </a:p>
-              <a:p>
-                <a:pPr lvl="0" indent="0" marL="0">
-                  <a:buNone/>
-                </a:pPr>
-                <a:r>
-                  <a:rPr/>
-                  <a:t>The relationship between forecast quality and value is </a:t>
-                </a:r>
-                <a:r>
-                  <a:rPr b="1"/>
-                  <a:t>nonlinear</a:t>
-                </a:r>
-                <a:r>
-                  <a:rPr/>
-                  <a:t>. Forecasts are most valuable near the </a:t>
-                </a:r>
-                <a:r>
-                  <a:rPr b="1"/>
-                  <a:t>decision boundary</a:t>
-                </a:r>
-                <a:r>
-                  <a:rPr/>
-                  <a:t> (</a:t>
-                </a:r>
-                <a14:m>
-                  <m:oMath xmlns:m="http://schemas.openxmlformats.org/officeDocument/2006/math">
-                    <m:r>
-                      <m:t>C</m:t>
-                    </m:r>
-                    <m:r>
-                      <m:rPr>
-                        <m:sty m:val="p"/>
-                      </m:rPr>
-                      <m:t>/</m:t>
-                    </m:r>
-                    <m:r>
-                      <m:t>L</m:t>
-                    </m:r>
-                    <m:r>
-                      <m:rPr>
-                        <m:sty m:val="p"/>
-                      </m:rPr>
-                      <m:t>≈</m:t>
-                    </m:r>
-                    <m:r>
-                      <m:t>p</m:t>
-                    </m:r>
-                  </m:oMath>
-                </a14:m>
-                <a:r>
-                  <a:rPr/>
-                  <a:t>). When the decision is already obvious, even a much better forecast adds little value.</a:t>
+                  <a:t>For continuous or high-dimensional problems, trees become intractable — the integral formulation is the compact representation.</a:t>
                 </a:r>
               </a:p>
             </p:txBody>
@@ -17480,201 +17579,6 @@
             </a:pPr>
             <a:r>
               <a:rPr/>
-              <a:t>Summary</a:t>
-            </a:r>
-          </a:p>
-        </p:txBody>
-      </p:sp>
-      <mc:AlternateContent xmlns:mc="http://schemas.openxmlformats.org/markup-compatibility/2006">
-        <mc:Choice xmlns:a14="http://schemas.microsoft.com/office/drawing/2010/main" Requires="a14">
-          <p:sp>
-            <p:nvSpPr>
-              <p:cNvPr id="3" name="Content Placeholder 2"/>
-              <p:cNvSpPr>
-                <a:spLocks noGrp="1"/>
-              </p:cNvSpPr>
-              <p:nvPr>
-                <p:ph idx="1"/>
-              </p:nvPr>
-            </p:nvSpPr>
-            <p:spPr/>
-            <p:txBody>
-              <a:bodyPr/>
-              <a:lstStyle/>
-              <a:p>
-                <a:pPr lvl="0" indent="-342900" marL="342900">
-                  <a:buAutoNum type="arabicPeriod"/>
-                </a:pPr>
-                <a:r>
-                  <a:rPr b="1"/>
-                  <a:t>Decision trees</a:t>
-                </a:r>
-                <a:r>
-                  <a:rPr/>
-                  <a:t> visualize the order of </a:t>
-                </a:r>
-                <a14:m>
-                  <m:oMath xmlns:m="http://schemas.openxmlformats.org/officeDocument/2006/math">
-                    <m:r>
-                      <m:rPr>
-                        <m:sty m:val="p"/>
-                      </m:rPr>
-                      <m:t>max</m:t>
-                    </m:r>
-                  </m:oMath>
-                </a14:m>
-                <a:r>
-                  <a:rPr/>
-                  <a:t> and </a:t>
-                </a:r>
-                <a14:m>
-                  <m:oMath xmlns:m="http://schemas.openxmlformats.org/officeDocument/2006/math">
-                    <m:r>
-                      <m:rPr>
-                        <m:sty m:val="p"/>
-                      </m:rPr>
-                      <m:t>∑</m:t>
-                    </m:r>
-                  </m:oMath>
-                </a14:m>
-                <a:r>
-                  <a:rPr/>
-                  <a:t> in expected value calculations. The EVPI is the gap between “nature first” and “decision first” trees.</a:t>
-                </a:r>
-              </a:p>
-              <a:p>
-                <a:pPr lvl="0" indent="-342900" marL="342900">
-                  <a:buAutoNum type="arabicPeriod"/>
-                </a:pPr>
-                <a:r>
-                  <a:rPr b="1"/>
-                  <a:t>EVII</a:t>
-                </a:r>
-                <a:r>
-                  <a:rPr/>
-                  <a:t> extends this to noisy signals: Signal </a:t>
-                </a:r>
-                <a14:m>
-                  <m:oMath xmlns:m="http://schemas.openxmlformats.org/officeDocument/2006/math">
-                    <m:r>
-                      <m:rPr>
-                        <m:sty m:val="p"/>
-                      </m:rPr>
-                      <m:t>→</m:t>
-                    </m:r>
-                  </m:oMath>
-                </a14:m>
-                <a:r>
-                  <a:rPr/>
-                  <a:t> Decision </a:t>
-                </a:r>
-                <a14:m>
-                  <m:oMath xmlns:m="http://schemas.openxmlformats.org/officeDocument/2006/math">
-                    <m:r>
-                      <m:rPr>
-                        <m:sty m:val="p"/>
-                      </m:rPr>
-                      <m:t>→</m:t>
-                    </m:r>
-                  </m:oMath>
-                </a14:m>
-                <a:r>
-                  <a:rPr/>
-                  <a:t> Nature. Bayes’ rule computes posteriors; Blackwell’s theorem guarantees </a:t>
-                </a:r>
-                <a14:m>
-                  <m:oMath xmlns:m="http://schemas.openxmlformats.org/officeDocument/2006/math">
-                    <m:r>
-                      <m:t>0</m:t>
-                    </m:r>
-                    <m:r>
-                      <m:rPr>
-                        <m:sty m:val="p"/>
-                      </m:rPr>
-                      <m:t>≤</m:t>
-                    </m:r>
-                    <m:r>
-                      <m:rPr>
-                        <m:nor/>
-                        <m:sty m:val="p"/>
-                      </m:rPr>
-                      <m:t>EVII</m:t>
-                    </m:r>
-                    <m:r>
-                      <m:rPr>
-                        <m:sty m:val="p"/>
-                      </m:rPr>
-                      <m:t>≤</m:t>
-                    </m:r>
-                    <m:r>
-                      <m:rPr>
-                        <m:nor/>
-                        <m:sty m:val="p"/>
-                      </m:rPr>
-                      <m:t>EVPI</m:t>
-                    </m:r>
-                  </m:oMath>
-                </a14:m>
-                <a:r>
-                  <a:rPr/>
-                  <a:t>.</a:t>
-                </a:r>
-              </a:p>
-              <a:p>
-                <a:pPr lvl="0" indent="-342900" marL="342900">
-                  <a:buAutoNum type="arabicPeriod"/>
-                </a:pPr>
-                <a:r>
-                  <a:rPr/>
-                  <a:t>For continuous or high-dimensional problems, trees become intractable — the integral formulation is the compact representation.</a:t>
-                </a:r>
-              </a:p>
-            </p:txBody>
-          </p:sp>
-        </mc:Choice>
-      </mc:AlternateContent>
-    </p:spTree>
-  </p:cSld>
-</p:sld>
-</file>
-
-<file path=ppt/slides/slide27.xml><?xml version="1.0" encoding="utf-8"?>
-<p:sld xmlns:a="http://schemas.openxmlformats.org/drawingml/2006/main" xmlns:r="http://schemas.openxmlformats.org/officeDocument/2006/relationships" xmlns:p="http://schemas.openxmlformats.org/presentationml/2006/main">
-  <p:cSld>
-    <p:spTree>
-      <p:nvGrpSpPr>
-        <p:cNvPr id="1" name=""/>
-        <p:cNvGrpSpPr/>
-        <p:nvPr/>
-      </p:nvGrpSpPr>
-      <p:grpSpPr>
-        <a:xfrm>
-          <a:off x="0" y="0"/>
-          <a:ext cx="0" cy="0"/>
-          <a:chOff x="0" y="0"/>
-          <a:chExt cx="0" cy="0"/>
-        </a:xfrm>
-      </p:grpSpPr>
-      <p:sp>
-        <p:nvSpPr>
-          <p:cNvPr id="2" name="Title 1"/>
-          <p:cNvSpPr>
-            <a:spLocks noGrp="1"/>
-          </p:cNvSpPr>
-          <p:nvPr>
-            <p:ph type="title"/>
-          </p:nvPr>
-        </p:nvSpPr>
-        <p:spPr/>
-        <p:txBody>
-          <a:bodyPr/>
-          <a:lstStyle/>
-          <a:p>
-            <a:pPr lvl="0" indent="0" marL="0">
-              <a:buNone/>
-            </a:pPr>
-            <a:r>
-              <a:rPr/>
               <a:t>References</a:t>
             </a:r>
           </a:p>
@@ -17728,10 +17632,7 @@
 </p:sld>
 </file>
 
-<file path=ppt/slides/slide3.xml><?xml version="1.0" encoding="UTF-8"?><p:sld xmlns:a="http://schemas.openxmlformats.org/drawingml/2006/main" xmlns:r="http://schemas.openxmlformats.org/officeDocument/2006/relationships" xmlns:p="http://schemas.openxmlformats.org/presentationml/2006/main"><p:cSld><p:spTree><p:nvGrpSpPr><p:cNvPr id="1" name="" /><p:cNvGrpSpPr /><p:nvPr /></p:nvGrpSpPr><p:grpSpPr><a:xfrm><a:off x="0" y="0" /><a:ext cx="0" cy="0" /><a:chOff x="0" y="0" /><a:chExt cx="0" cy="0" /></a:xfrm></p:grpSpPr><p:sp><p:nvSpPr><p:cNvPr id="2" name="Title 1" /><p:cNvSpPr><a:spLocks noGrp="1" /></p:cNvSpPr><p:nvPr><p:ph type="title" /></p:nvPr></p:nvSpPr><p:spPr /><p:txBody><a:bodyPr /><a:lstStyle /><a:p><a:pPr lvl="0" indent="0" marL="0"><a:buNone /></a:pPr><a:r><a:rPr /><a:t>Recap: Monday’s Umbrella Problem</a:t></a:r></a:p></p:txBody></p:sp><p:graphicFrame><p:nvGraphicFramePr><p:cNvPr id="6" name="Content Placeholder 5" /><p:cNvGraphicFramePr><a:graphicFrameLocks noGrp="1" /></p:cNvGraphicFramePr><p:nvPr><p:ph idx="1" /></p:nvPr></p:nvGraphicFramePr><p:xfrm><a:off x="457200" y="1193800" /><a:ext cx="8229600" cy="3390900" /></p:xfrm><a:graphic><a:graphicData uri="http://schemas.openxmlformats.org/drawingml/2006/table"><a:tbl><a:tblPr firstRow="1" bandRow="1"><a:tableStyleId>{5C22544A-7EE6-4342-B048-85BDC9FD1C3A}</a:tableStyleId></a:tblPr><a:tblGrid><a:gridCol w="2743200" /><a:gridCol w="2743200" /><a:gridCol w="2743200" /></a:tblGrid><a:tr h="0"><a:tc><a:txBody><a:bodyPr /><a:lstStyle /><a:p><a:endParaRPr /></a:p></a:txBody><a:tcPr /></a:tc><a:tc><a:txBody><a:bodyPr /><a:lstStyle /><a:p><a:pPr lvl="0" indent="0" marL="0" algn="ctr"><a:buNone /></a:pPr><a:r><a:rPr /><a:t>Bring umbrella</a:t></a:r></a:p></a:txBody><a:tcPr /></a:tc><a:tc><a:txBody><a:bodyPr /><a:lstStyle /><a:p><a:pPr lvl="0" indent="0" marL="0" algn="ctr"><a:buNone /></a:pPr><a:r><a:rPr /><a:t>Don’t bring</a:t></a:r></a:p></a:txBody><a:tcPr /></a:tc></a:tr><a:tr h="0"><a:tc><a:txBody><a:bodyPr /><a:lstStyle /><a:p><a:pPr lvl="0" indent="0" marL="0" algn="l"><a:buNone /></a:pPr><a:r><a:rPr /><a:t>Rain (</a:t></a:r><a14:m><m:oMath xmlns:m="http://schemas.openxmlformats.org/officeDocument/2006/math"><m:r><m:t>p</m:t></m:r><m:r><m:rPr><m:sty m:val="p" /></m:rPr><m:t>=</m:t></m:r><m:r><m:t>0.3</m:t></m:r></m:oMath></a14:m><a:r><a:rPr /><a:t>)</a:t></a:r></a:p></a:txBody></a:tc><a:tc><a:txBody><a:bodyPr /><a:lstStyle /><a:p><a:pPr lvl="0" indent="0" marL="0" algn="ctr"><a:buNone /></a:pPr><a14:m><m:oMath xmlns:m="http://schemas.openxmlformats.org/officeDocument/2006/math"><m:r><m:rPr><m:sty m:val="p" /></m:rPr><m:t>−</m:t></m:r><m:r><m:t>5</m:t></m:r></m:oMath></a14:m></a:p></a:txBody></a:tc><a:tc><a:txBody><a:bodyPr /><a:lstStyle /><a:p><a:pPr lvl="0" indent="0" marL="0" algn="ctr"><a:buNone /></a:pPr><a14:m><m:oMath xmlns:m="http://schemas.openxmlformats.org/officeDocument/2006/math"><m:r><m:rPr><m:sty m:val="p" /></m:rPr><m:t>−</m:t></m:r><m:r><m:t>50</m:t></m:r></m:oMath></a14:m></a:p></a:txBody></a:tc></a:tr><a:tr h="0"><a:tc><a:txBody><a:bodyPr /><a:lstStyle /><a:p><a:pPr lvl="0" indent="0" marL="0" algn="l"><a:buNone /></a:pPr><a:r><a:rPr /><a:t>No rain (</a:t></a:r><a14:m><m:oMath xmlns:m="http://schemas.openxmlformats.org/officeDocument/2006/math"><m:r><m:t>1</m:t></m:r><m:r><m:rPr><m:sty m:val="p" /></m:rPr><m:t>−</m:t></m:r><m:r><m:t>p</m:t></m:r><m:r><m:rPr><m:sty m:val="p" /></m:rPr><m:t>=</m:t></m:r><m:r><m:t>0.7</m:t></m:r></m:oMath></a14:m><a:r><a:rPr /><a:t>)</a:t></a:r></a:p></a:txBody></a:tc><a:tc><a:txBody><a:bodyPr /><a:lstStyle /><a:p><a:pPr lvl="0" indent="0" marL="0" algn="ctr"><a:buNone /></a:pPr><a14:m><m:oMath xmlns:m="http://schemas.openxmlformats.org/officeDocument/2006/math"><m:r><m:rPr><m:sty m:val="p" /></m:rPr><m:t>−</m:t></m:r><m:r><m:t>5</m:t></m:r></m:oMath></a14:m></a:p></a:txBody></a:tc><a:tc><a:txBody><a:bodyPr /><a:lstStyle /><a:p><a:pPr lvl="0" indent="0" marL="0" algn="ctr"><a:buNone /></a:pPr><a14:m><m:oMath xmlns:m="http://schemas.openxmlformats.org/officeDocument/2006/math"><m:r><m:t>0</m:t></m:r></m:oMath></a14:m></a:p></a:txBody></a:tc></a:tr></a:tbl></a:graphicData></a:graphic></p:graphicFrame></p:spTree></p:cSld></p:sld>
-</file>
-
-<file path=ppt/slides/slide4.xml><?xml version="1.0" encoding="utf-8"?>
+<file path=ppt/slides/slide3.xml><?xml version="1.0" encoding="utf-8"?>
 <p:sld xmlns:a="http://schemas.openxmlformats.org/drawingml/2006/main" xmlns:r="http://schemas.openxmlformats.org/officeDocument/2006/relationships" xmlns:p="http://schemas.openxmlformats.org/presentationml/2006/main">
   <p:cSld>
     <p:spTree>
@@ -17917,7 +17818,7 @@
 </p:sld>
 </file>
 
-<file path=ppt/slides/slide5.xml><?xml version="1.0" encoding="utf-8"?>
+<file path=ppt/slides/slide4.xml><?xml version="1.0" encoding="utf-8"?>
 <p:sld xmlns:a="http://schemas.openxmlformats.org/drawingml/2006/main" xmlns:r="http://schemas.openxmlformats.org/officeDocument/2006/relationships" xmlns:p="http://schemas.openxmlformats.org/presentationml/2006/main">
   <p:cSld>
     <p:spTree>
@@ -18050,7 +17951,7 @@
 </p:sld>
 </file>
 
-<file path=ppt/slides/slide6.xml><?xml version="1.0" encoding="utf-8"?>
+<file path=ppt/slides/slide5.xml><?xml version="1.0" encoding="utf-8"?>
 <p:sld xmlns:a="http://schemas.openxmlformats.org/drawingml/2006/main" xmlns:r="http://schemas.openxmlformats.org/officeDocument/2006/relationships" xmlns:p="http://schemas.openxmlformats.org/presentationml/2006/main">
   <p:cSld>
     <p:spTree>
@@ -20291,7 +20192,7 @@
 </p:sld>
 </file>
 
-<file path=ppt/slides/slide7.xml><?xml version="1.0" encoding="utf-8"?>
+<file path=ppt/slides/slide6.xml><?xml version="1.0" encoding="utf-8"?>
 <p:sld xmlns:a="http://schemas.openxmlformats.org/drawingml/2006/main" xmlns:r="http://schemas.openxmlformats.org/officeDocument/2006/relationships" xmlns:p="http://schemas.openxmlformats.org/presentationml/2006/main">
   <p:cSld>
     <p:spTree>
@@ -20338,7 +20239,7 @@
 </p:sld>
 </file>
 
-<file path=ppt/slides/slide8.xml><?xml version="1.0" encoding="utf-8"?>
+<file path=ppt/slides/slide7.xml><?xml version="1.0" encoding="utf-8"?>
 <p:sld xmlns:a="http://schemas.openxmlformats.org/drawingml/2006/main" xmlns:r="http://schemas.openxmlformats.org/officeDocument/2006/relationships" xmlns:p="http://schemas.openxmlformats.org/presentationml/2006/main">
   <p:cSld>
     <p:spTree>
@@ -20630,7 +20531,7 @@
 </p:sld>
 </file>
 
-<file path=ppt/slides/slide9.xml><?xml version="1.0" encoding="utf-8"?>
+<file path=ppt/slides/slide8.xml><?xml version="1.0" encoding="utf-8"?>
 <p:sld xmlns:a="http://schemas.openxmlformats.org/drawingml/2006/main" xmlns:r="http://schemas.openxmlformats.org/officeDocument/2006/relationships" xmlns:p="http://schemas.openxmlformats.org/presentationml/2006/main">
   <p:cSld>
     <p:spTree>
@@ -23010,6 +22911,53 @@
           </a:ln>
         </p:spPr>
       </p:pic>
+    </p:spTree>
+  </p:cSld>
+</p:sld>
+</file>
+
+<file path=ppt/slides/slide9.xml><?xml version="1.0" encoding="utf-8"?>
+<p:sld xmlns:a="http://schemas.openxmlformats.org/drawingml/2006/main" xmlns:r="http://schemas.openxmlformats.org/officeDocument/2006/relationships" xmlns:p="http://schemas.openxmlformats.org/presentationml/2006/main">
+  <p:cSld>
+    <p:spTree>
+      <p:nvGrpSpPr>
+        <p:cNvPr id="1" name=""/>
+        <p:cNvGrpSpPr/>
+        <p:nvPr/>
+      </p:nvGrpSpPr>
+      <p:grpSpPr>
+        <a:xfrm>
+          <a:off x="0" y="0"/>
+          <a:ext cx="0" cy="0"/>
+          <a:chOff x="0" y="0"/>
+          <a:chExt cx="0" cy="0"/>
+        </a:xfrm>
+      </p:grpSpPr>
+      <p:sp>
+        <p:nvSpPr>
+          <p:cNvPr id="3" name="Content Placeholder 2"/>
+          <p:cNvSpPr>
+            <a:spLocks noGrp="1"/>
+          </p:cNvSpPr>
+          <p:nvPr>
+            <p:ph idx="1"/>
+          </p:nvPr>
+        </p:nvSpPr>
+        <p:spPr/>
+        <p:txBody>
+          <a:bodyPr/>
+          <a:lstStyle/>
+          <a:p>
+            <a:pPr lvl="0" indent="0" marL="0">
+              <a:buNone/>
+            </a:pPr>
+            <a:r>
+              <a:rPr/>
+              <a:t>Decision tree with perfect information. Nature reveals the state, then you choose.</a:t>
+            </a:r>
+          </a:p>
+        </p:txBody>
+      </p:sp>
     </p:spTree>
   </p:cSld>
 </p:sld>

--- a/lectures/week-07/evii.pptx
+++ b/lectures/week-07/evii.pptx
@@ -8200,7 +8200,7 @@
                 </a:pPr>
                 <a:r>
                   <a:rPr/>
-                  <a:t>A key result (Blackwell 1953): </a:t>
+                  <a:t>A key result: </a:t>
                 </a:r>
                 <a14:m>
                   <m:oMath xmlns:m="http://schemas.openxmlformats.org/officeDocument/2006/math">
@@ -8545,49 +8545,6 @@
             <a:r>
               <a:rPr/>
               <a:t>References</a:t>
-            </a:r>
-          </a:p>
-        </p:txBody>
-      </p:sp>
-      <p:sp>
-        <p:nvSpPr>
-          <p:cNvPr id="3" name="Content Placeholder 2"/>
-          <p:cNvSpPr>
-            <a:spLocks noGrp="1"/>
-          </p:cNvSpPr>
-          <p:nvPr>
-            <p:ph idx="1"/>
-          </p:nvPr>
-        </p:nvSpPr>
-        <p:spPr/>
-        <p:txBody>
-          <a:bodyPr/>
-          <a:lstStyle/>
-          <a:p>
-            <a:pPr lvl="0" indent="0" marL="0">
-              <a:buNone/>
-            </a:pPr>
-            <a:r>
-              <a:rPr/>
-              <a:t>Blackwell, David. 1953. “Equivalent Comparisons of Experiments.” </a:t>
-            </a:r>
-            <a:r>
-              <a:rPr i="1"/>
-              <a:t>The Annals of Mathematical Statistics</a:t>
-            </a:r>
-            <a:r>
-              <a:rPr/>
-              <a:t> 24 (2): 265–72. </a:t>
-            </a:r>
-            <a:r>
-              <a:rPr>
-                <a:hlinkClick r:id="rId2"/>
-              </a:rPr>
-              <a:t>https://doi.org/10.1214/aoms/1177729032</a:t>
-            </a:r>
-            <a:r>
-              <a:rPr/>
-              <a:t>.</a:t>
             </a:r>
           </a:p>
         </p:txBody>

--- a/lectures/week-07/evii.pptx
+++ b/lectures/week-07/evii.pptx
@@ -5210,7 +5210,7 @@
             <a:br/>
             <a:r>
               <a:rPr/>
-              <a:t>Dr. James Doss-Gollin</a:t>
+              <a:t>James Doss-Gollin</a:t>
             </a:r>
           </a:p>
         </p:txBody>

--- a/lectures/week-07/evii.pptx
+++ b/lectures/week-07/evii.pptx
@@ -5327,36 +5327,38 @@
                     <m:r>
                       <m:t>P</m:t>
                     </m:r>
-                    <m:d>
-                      <m:dPr>
-                        <m:begChr m:val="("/>
-                        <m:sepChr m:val=""/>
-                        <m:endChr m:val=")"/>
-                        <m:grow/>
-                      </m:dPr>
-                      <m:e>
-                        <m:r>
-                          <m:rPr>
-                            <m:nor/>
-                            <m:sty m:val="p"/>
-                          </m:rPr>
-                          <m:t>f. rain</m:t>
-                        </m:r>
-                        <m:r>
-                          <m:rPr>
-                            <m:sty m:val="p"/>
-                          </m:rPr>
-                          <m:t>∣</m:t>
-                        </m:r>
-                        <m:r>
-                          <m:rPr>
-                            <m:nor/>
-                            <m:sty m:val="p"/>
-                          </m:rPr>
-                          <m:t>rain</m:t>
-                        </m:r>
-                      </m:e>
-                    </m:d>
+                    <m:r>
+                      <m:rPr>
+                        <m:sty m:val="p"/>
+                      </m:rPr>
+                      <m:t>(</m:t>
+                    </m:r>
+                    <m:r>
+                      <m:rPr>
+                        <m:nor/>
+                        <m:sty m:val="p"/>
+                      </m:rPr>
+                      <m:t>f. rain</m:t>
+                    </m:r>
+                    <m:r>
+                      <m:rPr>
+                        <m:sty m:val="p"/>
+                      </m:rPr>
+                      <m:t>∣</m:t>
+                    </m:r>
+                    <m:r>
+                      <m:rPr>
+                        <m:nor/>
+                        <m:sty m:val="p"/>
+                      </m:rPr>
+                      <m:t>rain</m:t>
+                    </m:r>
+                    <m:r>
+                      <m:rPr>
+                        <m:sty m:val="p"/>
+                      </m:rPr>
+                      <m:t>)</m:t>
+                    </m:r>
                     <m:r>
                       <m:rPr>
                         <m:sty m:val="p"/>
@@ -5384,36 +5386,38 @@
                     <m:r>
                       <m:t>P</m:t>
                     </m:r>
-                    <m:d>
-                      <m:dPr>
-                        <m:begChr m:val="("/>
-                        <m:sepChr m:val=""/>
-                        <m:endChr m:val=")"/>
-                        <m:grow/>
-                      </m:dPr>
-                      <m:e>
-                        <m:r>
-                          <m:rPr>
-                            <m:nor/>
-                            <m:sty m:val="p"/>
-                          </m:rPr>
-                          <m:t>f. dry</m:t>
-                        </m:r>
-                        <m:r>
-                          <m:rPr>
-                            <m:sty m:val="p"/>
-                          </m:rPr>
-                          <m:t>∣</m:t>
-                        </m:r>
-                        <m:r>
-                          <m:rPr>
-                            <m:nor/>
-                            <m:sty m:val="p"/>
-                          </m:rPr>
-                          <m:t>dry</m:t>
-                        </m:r>
-                      </m:e>
-                    </m:d>
+                    <m:r>
+                      <m:rPr>
+                        <m:sty m:val="p"/>
+                      </m:rPr>
+                      <m:t>(</m:t>
+                    </m:r>
+                    <m:r>
+                      <m:rPr>
+                        <m:nor/>
+                        <m:sty m:val="p"/>
+                      </m:rPr>
+                      <m:t>f. dry</m:t>
+                    </m:r>
+                    <m:r>
+                      <m:rPr>
+                        <m:sty m:val="p"/>
+                      </m:rPr>
+                      <m:t>∣</m:t>
+                    </m:r>
+                    <m:r>
+                      <m:rPr>
+                        <m:nor/>
+                        <m:sty m:val="p"/>
+                      </m:rPr>
+                      <m:t>dry</m:t>
+                    </m:r>
+                    <m:r>
+                      <m:rPr>
+                        <m:sty m:val="p"/>
+                      </m:rPr>
+                      <m:t>)</m:t>
+                    </m:r>
                     <m:r>
                       <m:rPr>
                         <m:sty m:val="p"/>
@@ -5448,23 +5452,25 @@
                     <m:r>
                       <m:t>P</m:t>
                     </m:r>
-                    <m:d>
-                      <m:dPr>
-                        <m:begChr m:val="("/>
-                        <m:sepChr m:val=""/>
-                        <m:endChr m:val=")"/>
-                        <m:grow/>
-                      </m:dPr>
-                      <m:e>
-                        <m:r>
-                          <m:rPr>
-                            <m:nor/>
-                            <m:sty m:val="p"/>
-                          </m:rPr>
-                          <m:t>f. rain</m:t>
-                        </m:r>
-                      </m:e>
-                    </m:d>
+                    <m:r>
+                      <m:rPr>
+                        <m:sty m:val="p"/>
+                      </m:rPr>
+                      <m:t>(</m:t>
+                    </m:r>
+                    <m:r>
+                      <m:rPr>
+                        <m:nor/>
+                        <m:sty m:val="p"/>
+                      </m:rPr>
+                      <m:t>f. rain</m:t>
+                    </m:r>
+                    <m:r>
+                      <m:rPr>
+                        <m:sty m:val="p"/>
+                      </m:rPr>
+                      <m:t>)</m:t>
+                    </m:r>
                   </m:oMath>
                 </a14:m>
                 <a:r>
@@ -5476,36 +5482,38 @@
                     <m:r>
                       <m:t>P</m:t>
                     </m:r>
-                    <m:d>
-                      <m:dPr>
-                        <m:begChr m:val="("/>
-                        <m:sepChr m:val=""/>
-                        <m:endChr m:val=")"/>
-                        <m:grow/>
-                      </m:dPr>
-                      <m:e>
-                        <m:r>
-                          <m:rPr>
-                            <m:nor/>
-                            <m:sty m:val="p"/>
-                          </m:rPr>
-                          <m:t>rain</m:t>
-                        </m:r>
-                        <m:r>
-                          <m:rPr>
-                            <m:sty m:val="p"/>
-                          </m:rPr>
-                          <m:t>∣</m:t>
-                        </m:r>
-                        <m:r>
-                          <m:rPr>
-                            <m:nor/>
-                            <m:sty m:val="p"/>
-                          </m:rPr>
-                          <m:t>f. rain</m:t>
-                        </m:r>
-                      </m:e>
-                    </m:d>
+                    <m:r>
+                      <m:rPr>
+                        <m:sty m:val="p"/>
+                      </m:rPr>
+                      <m:t>(</m:t>
+                    </m:r>
+                    <m:r>
+                      <m:rPr>
+                        <m:nor/>
+                        <m:sty m:val="p"/>
+                      </m:rPr>
+                      <m:t>rain</m:t>
+                    </m:r>
+                    <m:r>
+                      <m:rPr>
+                        <m:sty m:val="p"/>
+                      </m:rPr>
+                      <m:t>∣</m:t>
+                    </m:r>
+                    <m:r>
+                      <m:rPr>
+                        <m:nor/>
+                        <m:sty m:val="p"/>
+                      </m:rPr>
+                      <m:t>f. rain</m:t>
+                    </m:r>
+                    <m:r>
+                      <m:rPr>
+                        <m:sty m:val="p"/>
+                      </m:rPr>
+                      <m:t>)</m:t>
+                    </m:r>
                   </m:oMath>
                 </a14:m>
                 <a:r>
@@ -5602,36 +5610,38 @@
                       <m:r>
                         <m:t>P</m:t>
                       </m:r>
-                      <m:d>
-                        <m:dPr>
-                          <m:begChr m:val="("/>
-                          <m:sepChr m:val=""/>
-                          <m:endChr m:val=")"/>
-                          <m:grow/>
-                        </m:dPr>
-                        <m:e>
-                          <m:r>
-                            <m:rPr>
-                              <m:nor/>
-                              <m:sty m:val="p"/>
-                            </m:rPr>
-                            <m:t>f. dry</m:t>
-                          </m:r>
-                          <m:r>
-                            <m:rPr>
-                              <m:sty m:val="p"/>
-                            </m:rPr>
-                            <m:t>∣</m:t>
-                          </m:r>
-                          <m:r>
-                            <m:rPr>
-                              <m:nor/>
-                              <m:sty m:val="p"/>
-                            </m:rPr>
-                            <m:t>rain</m:t>
-                          </m:r>
-                        </m:e>
-                      </m:d>
+                      <m:r>
+                        <m:rPr>
+                          <m:sty m:val="p"/>
+                        </m:rPr>
+                        <m:t>(</m:t>
+                      </m:r>
+                      <m:r>
+                        <m:rPr>
+                          <m:nor/>
+                          <m:sty m:val="p"/>
+                        </m:rPr>
+                        <m:t>f. dry</m:t>
+                      </m:r>
+                      <m:r>
+                        <m:rPr>
+                          <m:sty m:val="p"/>
+                        </m:rPr>
+                        <m:t>∣</m:t>
+                      </m:r>
+                      <m:r>
+                        <m:rPr>
+                          <m:nor/>
+                          <m:sty m:val="p"/>
+                        </m:rPr>
+                        <m:t>rain</m:t>
+                      </m:r>
+                      <m:r>
+                        <m:rPr>
+                          <m:sty m:val="p"/>
+                        </m:rPr>
+                        <m:t>)</m:t>
+                      </m:r>
                       <m:r>
                         <m:rPr>
                           <m:sty m:val="p"/>
@@ -5671,36 +5681,38 @@
                       <m:r>
                         <m:t>P</m:t>
                       </m:r>
-                      <m:d>
-                        <m:dPr>
-                          <m:begChr m:val="("/>
-                          <m:sepChr m:val=""/>
-                          <m:endChr m:val=")"/>
-                          <m:grow/>
-                        </m:dPr>
-                        <m:e>
-                          <m:r>
-                            <m:rPr>
-                              <m:nor/>
-                              <m:sty m:val="p"/>
-                            </m:rPr>
-                            <m:t>f. rain</m:t>
-                          </m:r>
-                          <m:r>
-                            <m:rPr>
-                              <m:sty m:val="p"/>
-                            </m:rPr>
-                            <m:t>∣</m:t>
-                          </m:r>
-                          <m:r>
-                            <m:rPr>
-                              <m:nor/>
-                              <m:sty m:val="p"/>
-                            </m:rPr>
-                            <m:t>dry</m:t>
-                          </m:r>
-                        </m:e>
-                      </m:d>
+                      <m:r>
+                        <m:rPr>
+                          <m:sty m:val="p"/>
+                        </m:rPr>
+                        <m:t>(</m:t>
+                      </m:r>
+                      <m:r>
+                        <m:rPr>
+                          <m:nor/>
+                          <m:sty m:val="p"/>
+                        </m:rPr>
+                        <m:t>f. rain</m:t>
+                      </m:r>
+                      <m:r>
+                        <m:rPr>
+                          <m:sty m:val="p"/>
+                        </m:rPr>
+                        <m:t>∣</m:t>
+                      </m:r>
+                      <m:r>
+                        <m:rPr>
+                          <m:nor/>
+                          <m:sty m:val="p"/>
+                        </m:rPr>
+                        <m:t>dry</m:t>
+                      </m:r>
+                      <m:r>
+                        <m:rPr>
+                          <m:sty m:val="p"/>
+                        </m:rPr>
+                        <m:t>)</m:t>
+                      </m:r>
                       <m:r>
                         <m:rPr>
                           <m:sty m:val="p"/>
@@ -5754,23 +5766,25 @@
                       <m:r>
                         <m:t>P</m:t>
                       </m:r>
-                      <m:d>
-                        <m:dPr>
-                          <m:begChr m:val="("/>
-                          <m:sepChr m:val=""/>
-                          <m:endChr m:val=")"/>
-                          <m:grow/>
-                        </m:dPr>
-                        <m:e>
-                          <m:r>
-                            <m:rPr>
-                              <m:nor/>
-                              <m:sty m:val="p"/>
-                            </m:rPr>
-                            <m:t>f. rain</m:t>
-                          </m:r>
-                        </m:e>
-                      </m:d>
+                      <m:r>
+                        <m:rPr>
+                          <m:sty m:val="p"/>
+                        </m:rPr>
+                        <m:t>(</m:t>
+                      </m:r>
+                      <m:r>
+                        <m:rPr>
+                          <m:nor/>
+                          <m:sty m:val="p"/>
+                        </m:rPr>
+                        <m:t>f. rain</m:t>
+                      </m:r>
+                      <m:r>
+                        <m:rPr>
+                          <m:sty m:val="p"/>
+                        </m:rPr>
+                        <m:t>)</m:t>
+                      </m:r>
                       <m:r>
                         <m:rPr>
                           <m:sty m:val="p"/>
@@ -5875,23 +5889,25 @@
                       <m:r>
                         <m:t>P</m:t>
                       </m:r>
-                      <m:d>
-                        <m:dPr>
-                          <m:begChr m:val="("/>
-                          <m:sepChr m:val=""/>
-                          <m:endChr m:val=")"/>
-                          <m:grow/>
-                        </m:dPr>
-                        <m:e>
-                          <m:r>
-                            <m:rPr>
-                              <m:nor/>
-                              <m:sty m:val="p"/>
-                            </m:rPr>
-                            <m:t>f. dry</m:t>
-                          </m:r>
-                        </m:e>
-                      </m:d>
+                      <m:r>
+                        <m:rPr>
+                          <m:sty m:val="p"/>
+                        </m:rPr>
+                        <m:t>(</m:t>
+                      </m:r>
+                      <m:r>
+                        <m:rPr>
+                          <m:nor/>
+                          <m:sty m:val="p"/>
+                        </m:rPr>
+                        <m:t>f. dry</m:t>
+                      </m:r>
+                      <m:r>
+                        <m:rPr>
+                          <m:sty m:val="p"/>
+                        </m:rPr>
+                        <m:t>)</m:t>
+                      </m:r>
                       <m:r>
                         <m:rPr>
                           <m:sty m:val="p"/>
@@ -6055,7 +6071,9 @@
         <p:nvSpPr>
           <p:cNvPr id="1" name="TextBox 3"/>
           <p:cNvSpPr txBox="1"/>
-          <p:nvPr/>
+          <p:nvPr>
+            <p:ph idx="1"/>
+          </p:nvPr>
         </p:nvSpPr>
         <p:spPr>
           <a:xfrm>
@@ -6166,20 +6184,64 @@
                       <m:r>
                         <m:t>P</m:t>
                       </m:r>
-                      <m:d>
-                        <m:dPr>
-                          <m:begChr m:val="("/>
-                          <m:sepChr m:val=""/>
-                          <m:endChr m:val=")"/>
-                          <m:grow/>
-                        </m:dPr>
-                        <m:e>
+                      <m:r>
+                        <m:rPr>
+                          <m:sty m:val="p"/>
+                        </m:rPr>
+                        <m:t>(</m:t>
+                      </m:r>
+                      <m:r>
+                        <m:rPr>
+                          <m:nor/>
+                          <m:sty m:val="p"/>
+                        </m:rPr>
+                        <m:t>rain</m:t>
+                      </m:r>
+                      <m:r>
+                        <m:rPr>
+                          <m:sty m:val="p"/>
+                        </m:rPr>
+                        <m:t>∣</m:t>
+                      </m:r>
+                      <m:r>
+                        <m:rPr>
+                          <m:nor/>
+                          <m:sty m:val="p"/>
+                        </m:rPr>
+                        <m:t>f. rain</m:t>
+                      </m:r>
+                      <m:r>
+                        <m:rPr>
+                          <m:sty m:val="p"/>
+                        </m:rPr>
+                        <m:t>)</m:t>
+                      </m:r>
+                      <m:r>
+                        <m:rPr>
+                          <m:sty m:val="p"/>
+                        </m:rPr>
+                        <m:t>=</m:t>
+                      </m:r>
+                      <m:f>
+                        <m:fPr>
+                          <m:type m:val="bar"/>
+                        </m:fPr>
+                        <m:num>
+                          <m:r>
+                            <m:t>P</m:t>
+                          </m:r>
+                          <m:r>
+                            <m:rPr>
+                              <m:sty m:val="p"/>
+                            </m:rPr>
+                            <m:t>(</m:t>
+                          </m:r>
                           <m:r>
                             <m:rPr>
                               <m:nor/>
                               <m:sty m:val="p"/>
                             </m:rPr>
-                            <m:t>rain</m:t>
+                            <m:t>f. rain</m:t>
                           </m:r>
                           <m:r>
                             <m:rPr>
@@ -6192,54 +6254,14 @@
                               <m:nor/>
                               <m:sty m:val="p"/>
                             </m:rPr>
-                            <m:t>f. rain</m:t>
+                            <m:t>rain</m:t>
                           </m:r>
-                        </m:e>
-                      </m:d>
-                      <m:r>
-                        <m:rPr>
-                          <m:sty m:val="p"/>
-                        </m:rPr>
-                        <m:t>=</m:t>
-                      </m:r>
-                      <m:f>
-                        <m:fPr>
-                          <m:type m:val="bar"/>
-                        </m:fPr>
-                        <m:num>
                           <m:r>
-                            <m:t>P</m:t>
+                            <m:rPr>
+                              <m:sty m:val="p"/>
+                            </m:rPr>
+                            <m:t>)</m:t>
                           </m:r>
-                          <m:d>
-                            <m:dPr>
-                              <m:begChr m:val="("/>
-                              <m:sepChr m:val=""/>
-                              <m:endChr m:val=")"/>
-                              <m:grow/>
-                            </m:dPr>
-                            <m:e>
-                              <m:r>
-                                <m:rPr>
-                                  <m:nor/>
-                                  <m:sty m:val="p"/>
-                                </m:rPr>
-                                <m:t>f. rain</m:t>
-                              </m:r>
-                              <m:r>
-                                <m:rPr>
-                                  <m:sty m:val="p"/>
-                                </m:rPr>
-                                <m:t>∣</m:t>
-                              </m:r>
-                              <m:r>
-                                <m:rPr>
-                                  <m:nor/>
-                                  <m:sty m:val="p"/>
-                                </m:rPr>
-                                <m:t>rain</m:t>
-                              </m:r>
-                            </m:e>
-                          </m:d>
                           <m:r>
                             <m:rPr>
                               <m:sty m:val="p"/>
@@ -6254,23 +6276,25 @@
                           <m:r>
                             <m:t>P</m:t>
                           </m:r>
-                          <m:d>
-                            <m:dPr>
-                              <m:begChr m:val="("/>
-                              <m:sepChr m:val=""/>
-                              <m:endChr m:val=")"/>
-                              <m:grow/>
-                            </m:dPr>
-                            <m:e>
-                              <m:r>
-                                <m:rPr>
-                                  <m:nor/>
-                                  <m:sty m:val="p"/>
-                                </m:rPr>
-                                <m:t>f. rain</m:t>
-                              </m:r>
-                            </m:e>
-                          </m:d>
+                          <m:r>
+                            <m:rPr>
+                              <m:sty m:val="p"/>
+                            </m:rPr>
+                            <m:t>(</m:t>
+                          </m:r>
+                          <m:r>
+                            <m:rPr>
+                              <m:nor/>
+                              <m:sty m:val="p"/>
+                            </m:rPr>
+                            <m:t>f. rain</m:t>
+                          </m:r>
+                          <m:r>
+                            <m:rPr>
+                              <m:sty m:val="p"/>
+                            </m:rPr>
+                            <m:t>)</m:t>
+                          </m:r>
                         </m:den>
                       </m:f>
                       <m:r>
@@ -6350,20 +6374,64 @@
                       <m:r>
                         <m:t>P</m:t>
                       </m:r>
-                      <m:d>
-                        <m:dPr>
-                          <m:begChr m:val="("/>
-                          <m:sepChr m:val=""/>
-                          <m:endChr m:val=")"/>
-                          <m:grow/>
-                        </m:dPr>
-                        <m:e>
+                      <m:r>
+                        <m:rPr>
+                          <m:sty m:val="p"/>
+                        </m:rPr>
+                        <m:t>(</m:t>
+                      </m:r>
+                      <m:r>
+                        <m:rPr>
+                          <m:nor/>
+                          <m:sty m:val="p"/>
+                        </m:rPr>
+                        <m:t>rain</m:t>
+                      </m:r>
+                      <m:r>
+                        <m:rPr>
+                          <m:sty m:val="p"/>
+                        </m:rPr>
+                        <m:t>∣</m:t>
+                      </m:r>
+                      <m:r>
+                        <m:rPr>
+                          <m:nor/>
+                          <m:sty m:val="p"/>
+                        </m:rPr>
+                        <m:t>f. dry</m:t>
+                      </m:r>
+                      <m:r>
+                        <m:rPr>
+                          <m:sty m:val="p"/>
+                        </m:rPr>
+                        <m:t>)</m:t>
+                      </m:r>
+                      <m:r>
+                        <m:rPr>
+                          <m:sty m:val="p"/>
+                        </m:rPr>
+                        <m:t>=</m:t>
+                      </m:r>
+                      <m:f>
+                        <m:fPr>
+                          <m:type m:val="bar"/>
+                        </m:fPr>
+                        <m:num>
+                          <m:r>
+                            <m:t>P</m:t>
+                          </m:r>
+                          <m:r>
+                            <m:rPr>
+                              <m:sty m:val="p"/>
+                            </m:rPr>
+                            <m:t>(</m:t>
+                          </m:r>
                           <m:r>
                             <m:rPr>
                               <m:nor/>
                               <m:sty m:val="p"/>
                             </m:rPr>
-                            <m:t>rain</m:t>
+                            <m:t>f. dry</m:t>
                           </m:r>
                           <m:r>
                             <m:rPr>
@@ -6376,54 +6444,14 @@
                               <m:nor/>
                               <m:sty m:val="p"/>
                             </m:rPr>
-                            <m:t>f. dry</m:t>
+                            <m:t>rain</m:t>
                           </m:r>
-                        </m:e>
-                      </m:d>
-                      <m:r>
-                        <m:rPr>
-                          <m:sty m:val="p"/>
-                        </m:rPr>
-                        <m:t>=</m:t>
-                      </m:r>
-                      <m:f>
-                        <m:fPr>
-                          <m:type m:val="bar"/>
-                        </m:fPr>
-                        <m:num>
                           <m:r>
-                            <m:t>P</m:t>
+                            <m:rPr>
+                              <m:sty m:val="p"/>
+                            </m:rPr>
+                            <m:t>)</m:t>
                           </m:r>
-                          <m:d>
-                            <m:dPr>
-                              <m:begChr m:val="("/>
-                              <m:sepChr m:val=""/>
-                              <m:endChr m:val=")"/>
-                              <m:grow/>
-                            </m:dPr>
-                            <m:e>
-                              <m:r>
-                                <m:rPr>
-                                  <m:nor/>
-                                  <m:sty m:val="p"/>
-                                </m:rPr>
-                                <m:t>f. dry</m:t>
-                              </m:r>
-                              <m:r>
-                                <m:rPr>
-                                  <m:sty m:val="p"/>
-                                </m:rPr>
-                                <m:t>∣</m:t>
-                              </m:r>
-                              <m:r>
-                                <m:rPr>
-                                  <m:nor/>
-                                  <m:sty m:val="p"/>
-                                </m:rPr>
-                                <m:t>rain</m:t>
-                              </m:r>
-                            </m:e>
-                          </m:d>
                           <m:r>
                             <m:rPr>
                               <m:sty m:val="p"/>
@@ -6438,23 +6466,25 @@
                           <m:r>
                             <m:t>P</m:t>
                           </m:r>
-                          <m:d>
-                            <m:dPr>
-                              <m:begChr m:val="("/>
-                              <m:sepChr m:val=""/>
-                              <m:endChr m:val=")"/>
-                              <m:grow/>
-                            </m:dPr>
-                            <m:e>
-                              <m:r>
-                                <m:rPr>
-                                  <m:nor/>
-                                  <m:sty m:val="p"/>
-                                </m:rPr>
-                                <m:t>f. dry</m:t>
-                              </m:r>
-                            </m:e>
-                          </m:d>
+                          <m:r>
+                            <m:rPr>
+                              <m:sty m:val="p"/>
+                            </m:rPr>
+                            <m:t>(</m:t>
+                          </m:r>
+                          <m:r>
+                            <m:rPr>
+                              <m:nor/>
+                              <m:sty m:val="p"/>
+                            </m:rPr>
+                            <m:t>f. dry</m:t>
+                          </m:r>
+                          <m:r>
+                            <m:rPr>
+                              <m:sty m:val="p"/>
+                            </m:rPr>
+                            <m:t>)</m:t>
+                          </m:r>
                         </m:den>
                       </m:f>
                       <m:r>
@@ -6717,7 +6747,9 @@
         <p:nvSpPr>
           <p:cNvPr id="1" name="TextBox 3"/>
           <p:cNvSpPr txBox="1"/>
-          <p:nvPr/>
+          <p:nvPr>
+            <p:ph idx="1"/>
+          </p:nvPr>
         </p:nvSpPr>
         <p:spPr>
           <a:xfrm>
@@ -6819,23 +6851,25 @@
                     <m:r>
                       <m:t>P</m:t>
                     </m:r>
-                    <m:d>
-                      <m:dPr>
-                        <m:begChr m:val="("/>
-                        <m:sepChr m:val=""/>
-                        <m:endChr m:val=")"/>
-                        <m:grow/>
-                      </m:dPr>
-                      <m:e>
-                        <m:r>
-                          <m:rPr>
-                            <m:nor/>
-                            <m:sty m:val="p"/>
-                          </m:rPr>
-                          <m:t>rain</m:t>
-                        </m:r>
-                      </m:e>
-                    </m:d>
+                    <m:r>
+                      <m:rPr>
+                        <m:sty m:val="p"/>
+                      </m:rPr>
+                      <m:t>(</m:t>
+                    </m:r>
+                    <m:r>
+                      <m:rPr>
+                        <m:nor/>
+                        <m:sty m:val="p"/>
+                      </m:rPr>
+                      <m:t>rain</m:t>
+                    </m:r>
+                    <m:r>
+                      <m:rPr>
+                        <m:sty m:val="p"/>
+                      </m:rPr>
+                      <m:t>)</m:t>
+                    </m:r>
                     <m:r>
                       <m:rPr>
                         <m:sty m:val="p"/>
@@ -6876,23 +6910,25 @@
                     <m:r>
                       <m:t>P</m:t>
                     </m:r>
-                    <m:d>
-                      <m:dPr>
-                        <m:begChr m:val="("/>
-                        <m:sepChr m:val=""/>
-                        <m:endChr m:val=")"/>
-                        <m:grow/>
-                      </m:dPr>
-                      <m:e>
-                        <m:r>
-                          <m:rPr>
-                            <m:nor/>
-                            <m:sty m:val="p"/>
-                          </m:rPr>
-                          <m:t>rain</m:t>
-                        </m:r>
-                      </m:e>
-                    </m:d>
+                    <m:r>
+                      <m:rPr>
+                        <m:sty m:val="p"/>
+                      </m:rPr>
+                      <m:t>(</m:t>
+                    </m:r>
+                    <m:r>
+                      <m:rPr>
+                        <m:nor/>
+                        <m:sty m:val="p"/>
+                      </m:rPr>
+                      <m:t>rain</m:t>
+                    </m:r>
+                    <m:r>
+                      <m:rPr>
+                        <m:sty m:val="p"/>
+                      </m:rPr>
+                      <m:t>)</m:t>
+                    </m:r>
                     <m:r>
                       <m:rPr>
                         <m:sty m:val="p"/>
@@ -6980,23 +7016,25 @@
                     <m:r>
                       <m:t>P</m:t>
                     </m:r>
-                    <m:d>
-                      <m:dPr>
-                        <m:begChr m:val="("/>
-                        <m:sepChr m:val=""/>
-                        <m:endChr m:val=")"/>
-                        <m:grow/>
-                      </m:dPr>
-                      <m:e>
-                        <m:r>
-                          <m:rPr>
-                            <m:nor/>
-                            <m:sty m:val="p"/>
-                          </m:rPr>
-                          <m:t>rain</m:t>
-                        </m:r>
-                      </m:e>
-                    </m:d>
+                    <m:r>
+                      <m:rPr>
+                        <m:sty m:val="p"/>
+                      </m:rPr>
+                      <m:t>(</m:t>
+                    </m:r>
+                    <m:r>
+                      <m:rPr>
+                        <m:nor/>
+                        <m:sty m:val="p"/>
+                      </m:rPr>
+                      <m:t>rain</m:t>
+                    </m:r>
+                    <m:r>
+                      <m:rPr>
+                        <m:sty m:val="p"/>
+                      </m:rPr>
+                      <m:t>)</m:t>
+                    </m:r>
                     <m:r>
                       <m:rPr>
                         <m:sty m:val="p"/>
@@ -7300,23 +7338,25 @@
                       <m:r>
                         <m:t>E</m:t>
                       </m:r>
-                      <m:d>
-                        <m:dPr>
-                          <m:begChr m:val="["/>
-                          <m:sepChr m:val=""/>
-                          <m:endChr m:val="]"/>
-                          <m:grow/>
-                        </m:dPr>
-                        <m:e>
-                          <m:r>
-                            <m:rPr>
-                              <m:nor/>
-                              <m:sty m:val="p"/>
-                            </m:rPr>
-                            <m:t>cost with forecast</m:t>
-                          </m:r>
-                        </m:e>
-                      </m:d>
+                      <m:r>
+                        <m:rPr>
+                          <m:sty m:val="p"/>
+                        </m:rPr>
+                        <m:t>[</m:t>
+                      </m:r>
+                      <m:r>
+                        <m:rPr>
+                          <m:nor/>
+                          <m:sty m:val="p"/>
+                        </m:rPr>
+                        <m:t>cost with forecast</m:t>
+                      </m:r>
+                      <m:r>
+                        <m:rPr>
+                          <m:sty m:val="p"/>
+                        </m:rPr>
+                        <m:t>]</m:t>
+                      </m:r>
                       <m:r>
                         <m:rPr>
                           <m:sty m:val="p"/>
@@ -7691,19 +7731,21 @@
                     <m:r>
                       <m:t>p</m:t>
                     </m:r>
-                    <m:d>
-                      <m:dPr>
-                        <m:begChr m:val="("/>
-                        <m:sepChr m:val=""/>
-                        <m:endChr m:val=")"/>
-                        <m:grow/>
-                      </m:dPr>
-                      <m:e>
-                        <m:r>
-                          <m:t>z</m:t>
-                        </m:r>
-                      </m:e>
-                    </m:d>
+                    <m:r>
+                      <m:rPr>
+                        <m:sty m:val="p"/>
+                      </m:rPr>
+                      <m:t>(</m:t>
+                    </m:r>
+                    <m:r>
+                      <m:t>z</m:t>
+                    </m:r>
+                    <m:r>
+                      <m:rPr>
+                        <m:sty m:val="p"/>
+                      </m:rPr>
+                      <m:t>)</m:t>
+                    </m:r>
                   </m:oMath>
                 </a14:m>
               </a:p>
@@ -7724,28 +7766,30 @@
                     <m:r>
                       <m:t>p</m:t>
                     </m:r>
-                    <m:d>
-                      <m:dPr>
-                        <m:begChr m:val="("/>
-                        <m:sepChr m:val=""/>
-                        <m:endChr m:val=")"/>
-                        <m:grow/>
-                      </m:dPr>
-                      <m:e>
-                        <m:r>
-                          <m:t>s</m:t>
-                        </m:r>
-                        <m:r>
-                          <m:rPr>
-                            <m:sty m:val="p"/>
-                          </m:rPr>
-                          <m:t>∣</m:t>
-                        </m:r>
-                        <m:r>
-                          <m:t>z</m:t>
-                        </m:r>
-                      </m:e>
-                    </m:d>
+                    <m:r>
+                      <m:rPr>
+                        <m:sty m:val="p"/>
+                      </m:rPr>
+                      <m:t>(</m:t>
+                    </m:r>
+                    <m:r>
+                      <m:t>s</m:t>
+                    </m:r>
+                    <m:r>
+                      <m:rPr>
+                        <m:sty m:val="p"/>
+                      </m:rPr>
+                      <m:t>∣</m:t>
+                    </m:r>
+                    <m:r>
+                      <m:t>z</m:t>
+                    </m:r>
+                    <m:r>
+                      <m:rPr>
+                        <m:sty m:val="p"/>
+                      </m:rPr>
+                      <m:t>)</m:t>
+                    </m:r>
                   </m:oMath>
                 </a14:m>
                 <a:r>
@@ -7827,56 +7871,60 @@
                                   <m:r>
                                     <m:t>U</m:t>
                                   </m:r>
-                                  <m:d>
-                                    <m:dPr>
-                                      <m:begChr m:val="("/>
-                                      <m:sepChr m:val=""/>
-                                      <m:endChr m:val=")"/>
-                                      <m:grow/>
-                                    </m:dPr>
-                                    <m:e>
-                                      <m:r>
-                                        <m:t>a</m:t>
-                                      </m:r>
-                                      <m:r>
-                                        <m:rPr>
-                                          <m:sty m:val="p"/>
-                                        </m:rPr>
-                                        <m:t>,</m:t>
-                                      </m:r>
-                                      <m:r>
-                                        <m:t>s</m:t>
-                                      </m:r>
-                                    </m:e>
-                                  </m:d>
+                                  <m:r>
+                                    <m:rPr>
+                                      <m:sty m:val="p"/>
+                                    </m:rPr>
+                                    <m:t>(</m:t>
+                                  </m:r>
+                                  <m:r>
+                                    <m:t>a</m:t>
+                                  </m:r>
+                                  <m:r>
+                                    <m:rPr>
+                                      <m:sty m:val="p"/>
+                                    </m:rPr>
+                                    <m:t>,</m:t>
+                                  </m:r>
+                                  <m:r>
+                                    <m:t>s</m:t>
+                                  </m:r>
+                                  <m:r>
+                                    <m:rPr>
+                                      <m:sty m:val="p"/>
+                                    </m:rPr>
+                                    <m:t>)</m:t>
+                                  </m:r>
                                   <m:r>
                                     <m:t> </m:t>
                                   </m:r>
                                   <m:r>
                                     <m:t>p</m:t>
                                   </m:r>
-                                  <m:d>
-                                    <m:dPr>
-                                      <m:begChr m:val="("/>
-                                      <m:sepChr m:val=""/>
-                                      <m:endChr m:val=")"/>
-                                      <m:grow/>
-                                    </m:dPr>
-                                    <m:e>
-                                      <m:r>
-                                        <m:t>s</m:t>
-                                      </m:r>
-                                      <m:r>
-                                        <m:rPr>
-                                          <m:sty m:val="p"/>
-                                        </m:rPr>
-                                        <m:t>∣</m:t>
-                                      </m:r>
-                                      <m:r>
-                                        <m:t>z</m:t>
-                                      </m:r>
-                                    </m:e>
-                                  </m:d>
+                                  <m:r>
+                                    <m:rPr>
+                                      <m:sty m:val="p"/>
+                                    </m:rPr>
+                                    <m:t>(</m:t>
+                                  </m:r>
+                                  <m:r>
+                                    <m:t>s</m:t>
+                                  </m:r>
+                                  <m:r>
+                                    <m:rPr>
+                                      <m:sty m:val="p"/>
+                                    </m:rPr>
+                                    <m:t>∣</m:t>
+                                  </m:r>
+                                  <m:r>
+                                    <m:t>z</m:t>
+                                  </m:r>
+                                  <m:r>
+                                    <m:rPr>
+                                      <m:sty m:val="p"/>
+                                    </m:rPr>
+                                    <m:t>)</m:t>
+                                  </m:r>
                                   <m:r>
                                     <m:t> </m:t>
                                   </m:r>
@@ -7891,19 +7939,21 @@
                               <m:r>
                                 <m:t>p</m:t>
                               </m:r>
-                              <m:d>
-                                <m:dPr>
-                                  <m:begChr m:val="("/>
-                                  <m:sepChr m:val=""/>
-                                  <m:endChr m:val=")"/>
-                                  <m:grow/>
-                                </m:dPr>
-                                <m:e>
-                                  <m:r>
-                                    <m:t>z</m:t>
-                                  </m:r>
-                                </m:e>
-                              </m:d>
+                              <m:r>
+                                <m:rPr>
+                                  <m:sty m:val="p"/>
+                                </m:rPr>
+                                <m:t>(</m:t>
+                              </m:r>
+                              <m:r>
+                                <m:t>z</m:t>
+                              </m:r>
+                              <m:r>
+                                <m:rPr>
+                                  <m:sty m:val="p"/>
+                                </m:rPr>
+                                <m:t>)</m:t>
+                              </m:r>
                               <m:r>
                                 <m:t> </m:t>
                               </m:r>
@@ -7974,47 +8024,51 @@
                               <m:r>
                                 <m:t>U</m:t>
                               </m:r>
-                              <m:d>
-                                <m:dPr>
-                                  <m:begChr m:val="("/>
-                                  <m:sepChr m:val=""/>
-                                  <m:endChr m:val=")"/>
-                                  <m:grow/>
-                                </m:dPr>
-                                <m:e>
-                                  <m:r>
-                                    <m:t>a</m:t>
-                                  </m:r>
-                                  <m:r>
-                                    <m:rPr>
-                                      <m:sty m:val="p"/>
-                                    </m:rPr>
-                                    <m:t>,</m:t>
-                                  </m:r>
-                                  <m:r>
-                                    <m:t>s</m:t>
-                                  </m:r>
-                                </m:e>
-                              </m:d>
+                              <m:r>
+                                <m:rPr>
+                                  <m:sty m:val="p"/>
+                                </m:rPr>
+                                <m:t>(</m:t>
+                              </m:r>
+                              <m:r>
+                                <m:t>a</m:t>
+                              </m:r>
+                              <m:r>
+                                <m:rPr>
+                                  <m:sty m:val="p"/>
+                                </m:rPr>
+                                <m:t>,</m:t>
+                              </m:r>
+                              <m:r>
+                                <m:t>s</m:t>
+                              </m:r>
+                              <m:r>
+                                <m:rPr>
+                                  <m:sty m:val="p"/>
+                                </m:rPr>
+                                <m:t>)</m:t>
+                              </m:r>
                               <m:r>
                                 <m:t> </m:t>
                               </m:r>
                               <m:r>
                                 <m:t>p</m:t>
                               </m:r>
-                              <m:d>
-                                <m:dPr>
-                                  <m:begChr m:val="("/>
-                                  <m:sepChr m:val=""/>
-                                  <m:endChr m:val=")"/>
-                                  <m:grow/>
-                                </m:dPr>
-                                <m:e>
-                                  <m:r>
-                                    <m:t>s</m:t>
-                                  </m:r>
-                                </m:e>
-                              </m:d>
+                              <m:r>
+                                <m:rPr>
+                                  <m:sty m:val="p"/>
+                                </m:rPr>
+                                <m:t>(</m:t>
+                              </m:r>
+                              <m:r>
+                                <m:t>s</m:t>
+                              </m:r>
+                              <m:r>
+                                <m:rPr>
+                                  <m:sty m:val="p"/>
+                                </m:rPr>
+                                <m:t>)</m:t>
+                              </m:r>
                               <m:r>
                                 <m:t> </m:t>
                               </m:r>
@@ -8073,28 +8127,30 @@
                     <m:r>
                       <m:t>p</m:t>
                     </m:r>
-                    <m:d>
-                      <m:dPr>
-                        <m:begChr m:val="("/>
-                        <m:sepChr m:val=""/>
-                        <m:endChr m:val=")"/>
-                        <m:grow/>
-                      </m:dPr>
-                      <m:e>
-                        <m:r>
-                          <m:t>s</m:t>
-                        </m:r>
-                        <m:r>
-                          <m:rPr>
-                            <m:sty m:val="p"/>
-                          </m:rPr>
-                          <m:t>∣</m:t>
-                        </m:r>
-                        <m:r>
-                          <m:t>z</m:t>
-                        </m:r>
-                      </m:e>
-                    </m:d>
+                    <m:r>
+                      <m:rPr>
+                        <m:sty m:val="p"/>
+                      </m:rPr>
+                      <m:t>(</m:t>
+                    </m:r>
+                    <m:r>
+                      <m:t>s</m:t>
+                    </m:r>
+                    <m:r>
+                      <m:rPr>
+                        <m:sty m:val="p"/>
+                      </m:rPr>
+                      <m:t>∣</m:t>
+                    </m:r>
+                    <m:r>
+                      <m:t>z</m:t>
+                    </m:r>
+                    <m:r>
+                      <m:rPr>
+                        <m:sty m:val="p"/>
+                      </m:rPr>
+                      <m:t>)</m:t>
+                    </m:r>
                     <m:r>
                       <m:rPr>
                         <m:sty m:val="p"/>
@@ -8104,19 +8160,21 @@
                     <m:r>
                       <m:t>p</m:t>
                     </m:r>
-                    <m:d>
-                      <m:dPr>
-                        <m:begChr m:val="("/>
-                        <m:sepChr m:val=""/>
-                        <m:endChr m:val=")"/>
-                        <m:grow/>
-                      </m:dPr>
-                      <m:e>
-                        <m:r>
-                          <m:t>s</m:t>
-                        </m:r>
-                      </m:e>
-                    </m:d>
+                    <m:r>
+                      <m:rPr>
+                        <m:sty m:val="p"/>
+                      </m:rPr>
+                      <m:t>(</m:t>
+                    </m:r>
+                    <m:r>
+                      <m:t>s</m:t>
+                    </m:r>
+                    <m:r>
+                      <m:rPr>
+                        <m:sty m:val="p"/>
+                      </m:rPr>
+                      <m:t>)</m:t>
+                    </m:r>
                   </m:oMath>
                 </a14:m>
                 <a:r>
@@ -8992,47 +9050,51 @@
                         </m:r>
                       </m:e>
                     </m:nary>
-                    <m:d>
-                      <m:dPr>
-                        <m:begChr m:val="("/>
-                        <m:sepChr m:val=""/>
-                        <m:endChr m:val=")"/>
-                        <m:grow/>
-                      </m:dPr>
-                      <m:e>
-                        <m:r>
-                          <m:t>a</m:t>
-                        </m:r>
-                        <m:r>
-                          <m:rPr>
-                            <m:sty m:val="p"/>
-                          </m:rPr>
-                          <m:t>,</m:t>
-                        </m:r>
-                        <m:r>
-                          <m:t>s</m:t>
-                        </m:r>
-                      </m:e>
-                    </m:d>
+                    <m:r>
+                      <m:rPr>
+                        <m:sty m:val="p"/>
+                      </m:rPr>
+                      <m:t>(</m:t>
+                    </m:r>
+                    <m:r>
+                      <m:t>a</m:t>
+                    </m:r>
+                    <m:r>
+                      <m:rPr>
+                        <m:sty m:val="p"/>
+                      </m:rPr>
+                      <m:t>,</m:t>
+                    </m:r>
+                    <m:r>
+                      <m:t>s</m:t>
+                    </m:r>
+                    <m:r>
+                      <m:rPr>
+                        <m:sty m:val="p"/>
+                      </m:rPr>
+                      <m:t>)</m:t>
+                    </m:r>
                     <m:r>
                       <m:t> </m:t>
                     </m:r>
                     <m:r>
                       <m:t>p</m:t>
                     </m:r>
-                    <m:d>
-                      <m:dPr>
-                        <m:begChr m:val="("/>
-                        <m:sepChr m:val=""/>
-                        <m:endChr m:val=")"/>
-                        <m:grow/>
-                      </m:dPr>
-                      <m:e>
-                        <m:r>
-                          <m:t>s</m:t>
-                        </m:r>
-                      </m:e>
-                    </m:d>
+                    <m:r>
+                      <m:rPr>
+                        <m:sty m:val="p"/>
+                      </m:rPr>
+                      <m:t>(</m:t>
+                    </m:r>
+                    <m:r>
+                      <m:t>s</m:t>
+                    </m:r>
+                    <m:r>
+                      <m:rPr>
+                        <m:sty m:val="p"/>
+                      </m:rPr>
+                      <m:t>)</m:t>
+                    </m:r>
                   </m:oMath>
                 </a14:m>
                 <a:r>
@@ -9078,7 +9140,9 @@
         <p:nvSpPr>
           <p:cNvPr id="1" name="TextBox 3"/>
           <p:cNvSpPr txBox="1"/>
-          <p:nvPr/>
+          <p:nvPr>
+            <p:ph idx="1"/>
+          </p:nvPr>
         </p:nvSpPr>
         <p:spPr>
           <a:xfrm>
@@ -9198,23 +9262,25 @@
                       <m:r>
                         <m:t>E</m:t>
                       </m:r>
-                      <m:d>
-                        <m:dPr>
-                          <m:begChr m:val="["/>
-                          <m:sepChr m:val=""/>
-                          <m:endChr m:val="]"/>
-                          <m:grow/>
-                        </m:dPr>
-                        <m:e>
-                          <m:r>
-                            <m:rPr>
-                              <m:nor/>
-                              <m:sty m:val="p"/>
-                            </m:rPr>
-                            <m:t>cost</m:t>
-                          </m:r>
-                        </m:e>
-                      </m:d>
+                      <m:r>
+                        <m:rPr>
+                          <m:sty m:val="p"/>
+                        </m:rPr>
+                        <m:t>[</m:t>
+                      </m:r>
+                      <m:r>
+                        <m:rPr>
+                          <m:nor/>
+                          <m:sty m:val="p"/>
+                        </m:rPr>
+                        <m:t>cost</m:t>
+                      </m:r>
+                      <m:r>
+                        <m:rPr>
+                          <m:sty m:val="p"/>
+                        </m:rPr>
+                        <m:t>]</m:t>
+                      </m:r>
                       <m:r>
                         <m:rPr>
                           <m:sty m:val="p"/>
@@ -9286,23 +9352,25 @@
                       <m:r>
                         <m:t>E</m:t>
                       </m:r>
-                      <m:d>
-                        <m:dPr>
-                          <m:begChr m:val="["/>
-                          <m:sepChr m:val=""/>
-                          <m:endChr m:val="]"/>
-                          <m:grow/>
-                        </m:dPr>
-                        <m:e>
-                          <m:r>
-                            <m:rPr>
-                              <m:nor/>
-                              <m:sty m:val="p"/>
-                            </m:rPr>
-                            <m:t>cost</m:t>
-                          </m:r>
-                        </m:e>
-                      </m:d>
+                      <m:r>
+                        <m:rPr>
+                          <m:sty m:val="p"/>
+                        </m:rPr>
+                        <m:t>[</m:t>
+                      </m:r>
+                      <m:r>
+                        <m:rPr>
+                          <m:nor/>
+                          <m:sty m:val="p"/>
+                        </m:rPr>
+                        <m:t>cost</m:t>
+                      </m:r>
+                      <m:r>
+                        <m:rPr>
+                          <m:sty m:val="p"/>
+                        </m:rPr>
+                        <m:t>]</m:t>
+                      </m:r>
                       <m:r>
                         <m:rPr>
                           <m:sty m:val="p"/>
@@ -9520,47 +9588,51 @@
                     <m:r>
                       <m:t>U</m:t>
                     </m:r>
-                    <m:d>
-                      <m:dPr>
-                        <m:begChr m:val="("/>
-                        <m:sepChr m:val=""/>
-                        <m:endChr m:val=")"/>
-                        <m:grow/>
-                      </m:dPr>
-                      <m:e>
-                        <m:r>
-                          <m:t>a</m:t>
-                        </m:r>
-                        <m:r>
-                          <m:rPr>
-                            <m:sty m:val="p"/>
-                          </m:rPr>
-                          <m:t>,</m:t>
-                        </m:r>
-                        <m:r>
-                          <m:t>s</m:t>
-                        </m:r>
-                      </m:e>
-                    </m:d>
+                    <m:r>
+                      <m:rPr>
+                        <m:sty m:val="p"/>
+                      </m:rPr>
+                      <m:t>(</m:t>
+                    </m:r>
+                    <m:r>
+                      <m:t>a</m:t>
+                    </m:r>
+                    <m:r>
+                      <m:rPr>
+                        <m:sty m:val="p"/>
+                      </m:rPr>
+                      <m:t>,</m:t>
+                    </m:r>
+                    <m:r>
+                      <m:t>s</m:t>
+                    </m:r>
+                    <m:r>
+                      <m:rPr>
+                        <m:sty m:val="p"/>
+                      </m:rPr>
+                      <m:t>)</m:t>
+                    </m:r>
                     <m:r>
                       <m:t> </m:t>
                     </m:r>
                     <m:r>
                       <m:t>p</m:t>
                     </m:r>
-                    <m:d>
-                      <m:dPr>
-                        <m:begChr m:val="("/>
-                        <m:sepChr m:val=""/>
-                        <m:endChr m:val=")"/>
-                        <m:grow/>
-                      </m:dPr>
-                      <m:e>
-                        <m:r>
-                          <m:t>s</m:t>
-                        </m:r>
-                      </m:e>
-                    </m:d>
+                    <m:r>
+                      <m:rPr>
+                        <m:sty m:val="p"/>
+                      </m:rPr>
+                      <m:t>(</m:t>
+                    </m:r>
+                    <m:r>
+                      <m:t>s</m:t>
+                    </m:r>
+                    <m:r>
+                      <m:rPr>
+                        <m:sty m:val="p"/>
+                      </m:rPr>
+                      <m:t>)</m:t>
+                    </m:r>
                   </m:oMath>
                 </a14:m>
                 <a:r>
@@ -9606,7 +9678,9 @@
         <p:nvSpPr>
           <p:cNvPr id="1" name="TextBox 3"/>
           <p:cNvSpPr txBox="1"/>
-          <p:nvPr/>
+          <p:nvPr>
+            <p:ph idx="1"/>
+          </p:nvPr>
         </p:nvSpPr>
         <p:spPr>
           <a:xfrm>
@@ -9782,23 +9856,25 @@
                       <m:r>
                         <m:t>E</m:t>
                       </m:r>
-                      <m:d>
-                        <m:dPr>
-                          <m:begChr m:val="["/>
-                          <m:sepChr m:val=""/>
-                          <m:endChr m:val="]"/>
-                          <m:grow/>
-                        </m:dPr>
-                        <m:e>
-                          <m:r>
-                            <m:rPr>
-                              <m:nor/>
-                              <m:sty m:val="p"/>
-                            </m:rPr>
-                            <m:t>cost</m:t>
-                          </m:r>
-                        </m:e>
-                      </m:d>
+                      <m:r>
+                        <m:rPr>
+                          <m:sty m:val="p"/>
+                        </m:rPr>
+                        <m:t>[</m:t>
+                      </m:r>
+                      <m:r>
+                        <m:rPr>
+                          <m:nor/>
+                          <m:sty m:val="p"/>
+                        </m:rPr>
+                        <m:t>cost</m:t>
+                      </m:r>
+                      <m:r>
+                        <m:rPr>
+                          <m:sty m:val="p"/>
+                        </m:rPr>
+                        <m:t>]</m:t>
+                      </m:r>
                       <m:r>
                         <m:rPr>
                           <m:sty m:val="p"/>
@@ -10067,47 +10143,51 @@
                     <m:r>
                       <m:t>U</m:t>
                     </m:r>
-                    <m:d>
-                      <m:dPr>
-                        <m:begChr m:val="("/>
-                        <m:sepChr m:val=""/>
-                        <m:endChr m:val=")"/>
-                        <m:grow/>
-                      </m:dPr>
-                      <m:e>
-                        <m:r>
-                          <m:t>a</m:t>
-                        </m:r>
-                        <m:r>
-                          <m:rPr>
-                            <m:sty m:val="p"/>
-                          </m:rPr>
-                          <m:t>,</m:t>
-                        </m:r>
-                        <m:r>
-                          <m:t>s</m:t>
-                        </m:r>
-                      </m:e>
-                    </m:d>
+                    <m:r>
+                      <m:rPr>
+                        <m:sty m:val="p"/>
+                      </m:rPr>
+                      <m:t>(</m:t>
+                    </m:r>
+                    <m:r>
+                      <m:t>a</m:t>
+                    </m:r>
+                    <m:r>
+                      <m:rPr>
+                        <m:sty m:val="p"/>
+                      </m:rPr>
+                      <m:t>,</m:t>
+                    </m:r>
+                    <m:r>
+                      <m:t>s</m:t>
+                    </m:r>
+                    <m:r>
+                      <m:rPr>
+                        <m:sty m:val="p"/>
+                      </m:rPr>
+                      <m:t>)</m:t>
+                    </m:r>
                     <m:r>
                       <m:t> </m:t>
                     </m:r>
                     <m:r>
                       <m:t>p</m:t>
                     </m:r>
-                    <m:d>
-                      <m:dPr>
-                        <m:begChr m:val="("/>
-                        <m:sepChr m:val=""/>
-                        <m:endChr m:val=")"/>
-                        <m:grow/>
-                      </m:dPr>
-                      <m:e>
-                        <m:r>
-                          <m:t>s</m:t>
-                        </m:r>
-                      </m:e>
-                    </m:d>
+                    <m:r>
+                      <m:rPr>
+                        <m:sty m:val="p"/>
+                      </m:rPr>
+                      <m:t>(</m:t>
+                    </m:r>
+                    <m:r>
+                      <m:t>s</m:t>
+                    </m:r>
+                    <m:r>
+                      <m:rPr>
+                        <m:sty m:val="p"/>
+                      </m:rPr>
+                      <m:t>)</m:t>
+                    </m:r>
                     <m:r>
                       <m:t> </m:t>
                     </m:r>
